--- a/Paper2Video项目汇报/Paper2Video项目汇报.pptx
+++ b/Paper2Video项目汇报/Paper2Video项目汇报.pptx
@@ -713,7 +713,7 @@
           <c:orientation val="minMax"/>
         </c:scaling>
         <c:delete val="0"/>
-        <c:axPos val="b"/>
+        <c:axPos val="l"/>
         <c:numFmt formatCode="General" sourceLinked="0"/>
         <c:majorTickMark val="none"/>
         <c:minorTickMark val="none"/>
@@ -748,7 +748,7 @@
           <c:orientation val="minMax"/>
         </c:scaling>
         <c:delete val="0"/>
-        <c:axPos val="l"/>
+        <c:axPos val="b"/>
         <c:majorGridlines>
           <c:spPr>
             <a:noFill/>
@@ -930,7 +930,7 @@
           <c:orientation val="minMax"/>
         </c:scaling>
         <c:delete val="0"/>
-        <c:axPos val="b"/>
+        <c:axPos val="l"/>
         <c:numFmt formatCode="General" sourceLinked="0"/>
         <c:majorTickMark val="none"/>
         <c:minorTickMark val="none"/>
@@ -965,7 +965,7 @@
           <c:orientation val="minMax"/>
         </c:scaling>
         <c:delete val="0"/>
-        <c:axPos val="l"/>
+        <c:axPos val="b"/>
         <c:majorGridlines>
           <c:spPr>
             <a:noFill/>

--- a/Paper2Video项目汇报/Paper2Video项目汇报.pptx
+++ b/Paper2Video项目汇报/Paper2Video项目汇报.pptx
@@ -1038,7 +1038,7 @@
                   <a:srgbClr val="0E3F8C"/>
                 </a:solidFill>
               </a:rPr>
-              <a:t>三个真实样本的 token 构成</a:t>
+              <a:t>这一篇论文，钱花在哪（token）</a:t>
             </a:r>
           </a:p>
         </c:rich>
@@ -1067,7 +1067,7 @@
     <c:plotArea>
       <c:barChart>
         <c:barDir val="col"/>
-        <c:grouping val="stacked"/>
+        <c:grouping val="clustered"/>
         <c:varyColors val="0"/>
         <c:ser>
           <c:idx val="0"/>
@@ -1078,7 +1078,7 @@
               <c:strCache>
                 <c:ptCount val="1"/>
                 <c:pt idx="0">
-                  <c:v>幻灯片桶</c:v>
+                  <c:v>token</c:v>
                 </c:pt>
               </c:strCache>
             </c:strRef>
@@ -1113,13 +1113,13 @@
               <c:strCache>
                 <c:ptCount val="3"/>
                 <c:pt idx="0">
-                  <c:v>英文论文 · 无返工</c:v>
+                  <c:v>生成幻灯片 · 首次</c:v>
                 </c:pt>
                 <c:pt idx="1">
-                  <c:v>中文论文 · 1 次返工</c:v>
+                  <c:v>生成幻灯片 · 返工 1 次</c:v>
                 </c:pt>
                 <c:pt idx="2">
-                  <c:v>中文论文 · 多次返工</c:v>
+                  <c:v>讲稿与光标描述</c:v>
                 </c:pt>
               </c:strCache>
             </c:strRef>
@@ -1130,93 +1130,20 @@
                 <c:formatCode>General</c:formatCode>
                 <c:ptCount val="3"/>
                 <c:pt idx="0">
-                  <c:v>13265</c:v>
+                  <c:v>28525</c:v>
                 </c:pt>
                 <c:pt idx="1">
-                  <c:v>38391</c:v>
+                  <c:v>9866</c:v>
                 </c:pt>
                 <c:pt idx="2">
-                  <c:v>68409</c:v>
-                </c:pt>
-              </c:numCache>
-            </c:numRef>
-          </c:val>
-        </c:ser>
-        <c:ser>
-          <c:idx val="1"/>
-          <c:order val="1"/>
-          <c:tx>
-            <c:strRef>
-              <c:f>sheet</c:f>
-              <c:strCache>
-                <c:ptCount val="1"/>
-                <c:pt idx="0">
-                  <c:v>讲稿桶</c:v>
-                </c:pt>
-              </c:strCache>
-            </c:strRef>
-          </c:tx>
-          <c:spPr>
-            <a:solidFill>
-              <a:srgbClr val="85B7EB"/>
-            </a:solidFill>
-          </c:spPr>
-          <c:dLbls>
-            <c:txPr>
-              <a:bodyPr/>
-              <a:p>
-                <a:pPr>
-                  <a:defRPr sz="750">
-                    <a:solidFill>
-                      <a:srgbClr val="1A2230"/>
-                    </a:solidFill>
-                  </a:defRPr>
-                </a:pPr>
-              </a:p>
-            </c:txPr>
-            <c:showVal val="1"/>
-            <c:showCatName val="0"/>
-            <c:showSerName val="0"/>
-            <c:showPercent val="0"/>
-            <c:showBubbleSize val="0"/>
-            <c:showLeaderLines val="0"/>
-          </c:dLbls>
-          <c:cat>
-            <c:strRef>
-              <c:strCache>
-                <c:ptCount val="3"/>
-                <c:pt idx="0">
-                  <c:v>英文论文 · 无返工</c:v>
-                </c:pt>
-                <c:pt idx="1">
-                  <c:v>中文论文 · 1 次返工</c:v>
-                </c:pt>
-                <c:pt idx="2">
-                  <c:v>中文论文 · 多次返工</c:v>
-                </c:pt>
-              </c:strCache>
-            </c:strRef>
-          </c:cat>
-          <c:val>
-            <c:numRef>
-              <c:numCache>
-                <c:formatCode>General</c:formatCode>
-                <c:ptCount val="3"/>
-                <c:pt idx="0">
-                  <c:v>42343</c:v>
-                </c:pt>
-                <c:pt idx="1">
                   <c:v>31569</c:v>
-                </c:pt>
-                <c:pt idx="2">
-                  <c:v>40241</c:v>
                 </c:pt>
               </c:numCache>
             </c:numRef>
           </c:val>
         </c:ser>
         <c:gapWidth val="219"/>
-        <c:overlap val="100"/>
+        <c:overlap val="-27"/>
         <c:axId val="89736801"/>
         <c:axId val="89736802"/>
       </c:barChart>
@@ -1308,29 +1235,6 @@
         <a:effectLst/>
       </c:spPr>
     </c:plotArea>
-    <c:legend>
-      <c:legendPos val="b"/>
-      <c:overlay val="0"/>
-      <c:spPr>
-        <a:noFill/>
-        <a:ln>
-          <a:noFill/>
-        </a:ln>
-        <a:effectLst/>
-      </c:spPr>
-      <c:txPr>
-        <a:bodyPr/>
-        <a:p>
-          <a:pPr>
-            <a:defRPr sz="900">
-              <a:solidFill>
-                <a:srgbClr val="4A5568"/>
-              </a:solidFill>
-            </a:defRPr>
-          </a:pPr>
-        </a:p>
-      </c:txPr>
-    </c:legend>
     <c:dispBlanksAs val="gap"/>
   </c:chart>
 </c:chartSpace>
@@ -1341,7 +1245,7 @@
   <p:cSld>
     <p:spTree>
       <p:nvGrpSpPr>
-        <p:cNvPr id="1" name="" descr="&lt;Slide style={{ width: 1280, height: 720, display: 'flex', flexDirection: 'column', background: '#0E3F8C', fontFamily: &quot;'Microsoft YaHei', 'PingFang SC', 'Noto Sans CJK SC', sans-serif&quot;, padding: 0 }}&gt;&#10;    &lt;Box style={{ height: 6, background: '#3D7BD9' }} /&gt;&#10;&#10;    &lt;Box style={{ flex: 1, flexDirection: 'column', padding: '52px 64px 0 64px', gap: 18 }}&gt;&#10;        &lt;Box style={{ flexDirection: 'row', alignItems: 'center', gap: 14 }}&gt;&#10;            &lt;Box style={{ width: 46, height: 3, background: '#3D7BD9' }} /&gt;&#10;            &lt;Text style={{ fontSize: 17, color: '#8FB6E8', letterSpacing: 3 }}&gt;课程项目汇报 · 2026&lt;/Text&gt;&#10;        &lt;/Box&gt;&#10;&#10;        &lt;Text style={{ fontSize: 58, fontWeight: 'bold', color: '#FFFFFF', lineHeight: 1.22 }}&gt;&#10;            把一篇论文，&lt;br /&gt;变成一段会讲课的视频&#10;        &lt;/Text&gt;&#10;&#10;        &lt;Text style={{ fontSize: 24, color: '#B5D4F4', fontFamily: &quot;'Times New Roman', Times, serif&quot;, letterSpacing: 0.5 }}&gt;&#10;            Automatic Video Generation from Scientific Papers&#10;        &lt;/Text&gt;&#10;&#10;        &lt;Text style={{ fontSize: 20, color: '#7FA9DE' }}&gt;&#10;            基于 Paper2Video 的国产化替换与工程化改造 · 单卡 RTX 5070 Ti 16GB&#10;        &lt;/Text&gt;&#10;&#10;        &lt;Box style={{ width: 1152, height: 226, background: '#FFFFFF', borderRadius: 4, marginTop: 8 }}&gt;&#10;            &lt;Image src='assets/paper_teaser.png' style={{ width: 1152, height: 226, objectFit: 'contain' }} /&gt;&#10;        &lt;/Box&gt;&#10;    &lt;/Box&gt;&#10;&#10;    &lt;Box style={{ height: 86, padding: '0 64px', flexDirection: 'row', alignItems: 'center', justifyContent: 'space-between' }}&gt;&#10;        &lt;Text style={{ fontSize: 16, color: '#8FB6E8' }}&gt;姓名：＿＿＿＿　　学号：＿＿＿＿　　指导教师：＿＿＿＿　　日期：＿＿＿＿&lt;/Text&gt;&#10;        &lt;Text style={{ fontSize: 15, color: '#5C86BE' }}&gt;图：论文 Fig.1（showlab/Paper2Video）&lt;/Text&gt;&#10;    &lt;/Box&gt;&#10;&lt;/Slide&gt;&#10;"/>
+        <p:cNvPr id="1" name=""/>
         <p:cNvGrpSpPr/>
         <p:nvPr/>
       </p:nvGrpSpPr>
@@ -1374,7 +1278,10 @@
         </p:spPr>
         <p:txBody>
           <a:bodyPr/>
-          <a:p/>
+          <a:p>
+            <a:pPr/>
+            <a:endParaRPr/>
+          </a:p>
         </p:txBody>
       </p:sp>
       <p:sp>
@@ -1398,7 +1305,10 @@
         </p:spPr>
         <p:txBody>
           <a:bodyPr/>
-          <a:p/>
+          <a:p>
+            <a:pPr/>
+            <a:endParaRPr/>
+          </a:p>
         </p:txBody>
       </p:sp>
       <p:sp>
@@ -1422,7 +1332,10 @@
         </p:spPr>
         <p:txBody>
           <a:bodyPr/>
-          <a:p/>
+          <a:p>
+            <a:pPr/>
+            <a:endParaRPr/>
+          </a:p>
         </p:txBody>
       </p:sp>
       <p:sp>
@@ -1666,7 +1579,10 @@
         </p:spPr>
         <p:txBody>
           <a:bodyPr/>
-          <a:p/>
+          <a:p>
+            <a:pPr/>
+            <a:endParaRPr/>
+          </a:p>
         </p:txBody>
       </p:sp>
       <p:pic>
@@ -1815,7 +1731,7 @@
   <p:cSld>
     <p:spTree>
       <p:nvGrpSpPr>
-        <p:cNvPr id="13" name="" descr="&lt;Slide style={{ width: 1280, height: 720, display: 'flex', flexDirection: 'column', background: '#FFFFFF', fontFamily: &quot;'Microsoft YaHei', 'PingFang SC', 'Noto Sans CJK SC', sans-serif&quot;, padding: 0 }}&gt;&#10;    &lt;Box style={{ height: 72, background: '#0E3F8C', flexDirection: 'row', alignItems: 'center', justifyContent: 'space-between', padding: '0 40px' }}&gt;&#10;        &lt;Text style={{ fontSize: 20, fontWeight: 'bold', color: '#FFFFFF' }}&gt;Paper2Video 项目汇报&lt;/Text&gt;&#10;        &lt;Text style={{ fontSize: 16, color: '#8FB6E8', letterSpacing: 2 }}&gt;难点 2 / 4&lt;/Text&gt;&#10;    &lt;/Box&gt;&#10;&#10;    &lt;Box style={{ flex: 1, flexDirection: 'column', padding: '24px 40px', gap: 16 }}&gt;&#10;        &lt;Box style={{ height: 44, flexDirection: 'row', alignItems: 'center', gap: 16 }}&gt;&#10;            &lt;Box style={{ width: 5, height: 34, background: '#1E4FA8', borderRadius: 2 }} /&gt;&#10;            &lt;Text style={{ fontSize: 36, fontWeight: 'bold', color: '#0E3F8C' }}&gt;论文的核心机制，在我这儿空转了&lt;/Text&gt;&#10;        &lt;/Box&gt;&#10;&#10;        &lt;Box style={{ height: 492, flexDirection: 'row', gap: 24 }}&gt;&#10;            &lt;Box style={{ width: 700, height: 492, flexDirection: 'column', gap: 12 }}&gt;&#10;                &lt;Box style={{ height: 340, flexDirection: 'row', gap: 20 }}&gt;&#10;                    &lt;Box style={{ width: 340, height: 340, background: '#F7F9FC', border: '1px solid #D6DCE5', borderRadius: 6, padding: 8 }}&gt;&#10;                        &lt;Image src='assets/tree_merged.png' style={{ width: 324, height: 324, objectFit: 'contain' }} /&gt;&#10;                    &lt;/Box&gt;&#10;                    &lt;Box style={{ width: 340, height: 340, flexDirection: 'column', gap: 10, justifyContent: 'center' }}&gt;&#10;                        &lt;Text style={{ fontSize: 20, fontWeight: 'bold', color: '#1E4FA8' }}&gt;VLM 看到的就是这张图&lt;/Text&gt;&#10;                        &lt;Text style={{ fontSize: 15, color: '#4A5568', lineHeight: 1.45 }}&gt;四个象限是同一页的四个版本：图片宽度分别是 0.25、0.5、0.75、1.0。规则负责生成候选，模型只负责挑一个。&lt;/Text&gt;&#10;                        &lt;Box style={{ background: '#F7F9FC', border: '1px solid #D6DCE5', borderRadius: 4, padding: '10px 12px' }}&gt;&#10;                            &lt;Text style={{ fontSize: 14, color: '#0E3F8C', lineHeight: 1.45, fontFamily: &quot;'Consolas', 'Courier New', monospace&quot; }}&gt;reason: 「A、B 把右侧轴裁掉了；C 的标签顶到边缘出现截断；D 把所有元素和图注都完整保留」  choice: 「D」&lt;/Text&gt;&#10;                        &lt;/Box&gt;&#10;                        &lt;Text style={{ fontSize: 13, color: '#8B97A8' }}&gt;论文里 VLM 返回的判定，格式就是这样的 JSON&lt;/Text&gt;&#10;                    &lt;/Box&gt;&#10;                &lt;/Box&gt;&#10;&#10;                &lt;Box style={{ flex: 1, flexDirection: 'column', gap: 6 }}&gt;&#10;                    &lt;Box style={{ width: 700, height: 110, background: '#F7F9FC', border: '1px solid #D6DCE5', borderRadius: 6, padding: 6 }}&gt;&#10;                        &lt;Image src='assets/tree_candidates_strip.png' style={{ width: 688, height: 98, objectFit: 'contain' }} /&gt;&#10;                    &lt;/Box&gt;&#10;                    &lt;Text style={{ fontSize: 13, color: '#8B97A8' }}&gt;四个宽度候选的原始渲染（0.25 / 0.5 / 0.75 / 1.0），本机跑出来的真实文件&lt;/Text&gt;&#10;                &lt;/Box&gt;&#10;            &lt;/Box&gt;&#10;&#10;            &lt;Box style={{ width: 476, height: 492, flexDirection: 'column', gap: 12 }}&gt;&#10;                &lt;Text style={{ fontSize: 17, color: '#1A2230', lineHeight: 1.5 }}&gt;我在界面上打开了这个开关，觉得出片很快，就去后台查它到底有没有干活。结论是：开关生效了，代码也执行了，但一页都没改进过。&lt;/Text&gt;&#10;&#10;                &lt;Box style={{ height: 154, background: '#FCEBEB', borderLeft: '4px solid #D9534F', borderRadius: 4, padding: '14px 16px', flexDirection: 'column', gap: 6 }}&gt;&#10;                    &lt;Text style={{ fontSize: 15, fontWeight: 'bold', color: '#A32D2D', letterSpacing: 1 }}&gt;差点被骗过去的地方&lt;/Text&gt;&#10;                    &lt;Text style={{ fontSize: 15, color: '#1A2230', lineHeight: 1.45 }}&gt;这个函数会无条件重写一份改进版的幻灯片源码。所以&quot;产物变了&quot;&quot;出现了新文件&quot;都不能当证据。可靠的判据只有一个：它工作时产生的那个目录空不空。&lt;/Text&gt;&#10;                &lt;/Box&gt;&#10;&#10;                &lt;Box style={{ flex: 1, background: '#F7F9FC', border: '1px solid #D6DCE5', borderRadius: 6, padding: '16px 18px', flexDirection: 'column', justifyContent: 'space-between' }}&gt;&#10;                    &lt;Text style={{ fontSize: 15, fontWeight: 'bold', color: '#1E4FA8', letterSpacing: 1 }}&gt;同一个机制，两个结果&lt;/Text&gt;&#10;                    &lt;Box style={{ flexDirection: 'row', alignItems: 'center', gap: 24 }}&gt;&#10;                        &lt;Box style={{ flexDirection: 'column', gap: 2 }}&gt;&#10;                            &lt;Text style={{ fontSize: 46, fontWeight: 'bold', color: '#1E4FA8', lineHeight: 1.05 }}&gt;7 次&lt;/Text&gt;&#10;                            &lt;Text style={{ fontSize: 14, color: '#4A5568', lineHeight: 1.4 }}&gt;跑论文自带的工程时&lt;br /&gt;真实发生的 VLM 调用&lt;/Text&gt;&#10;                        &lt;/Box&gt;&#10;                        &lt;Box style={{ width: 1, height: 76, background: '#B5D4F4' }} /&gt;&#10;                        &lt;Box style={{ flexDirection: 'column', gap: 2 }}&gt;&#10;                            &lt;Text style={{ fontSize: 46, fontWeight: 'bold', color: '#8B97A8', lineHeight: 1.05 }}&gt;0 次&lt;/Text&gt;&#10;                            &lt;Text style={{ fontSize: 14, color: '#4A5568', lineHeight: 1.4 }}&gt;换成只看正文的&lt;br /&gt;PDF 链路之后&lt;/Text&gt;&#10;                        &lt;/Box&gt;&#10;                    &lt;/Box&gt;&#10;                    &lt;Text style={{ fontSize: 15, color: '#4A5568', lineHeight: 1.45 }}&gt;它的入选门槛是&quot;排版溢出的页，而且那一页得有图片&quot;。我们的工程里一张图都没有，所以它一次都没被触发。&lt;/Text&gt;&#10;                &lt;/Box&gt;&#10;            &lt;/Box&gt;&#10;        &lt;/Box&gt;&#10;    &lt;/Box&gt;&#10;&#10;    &lt;Box style={{ height: 48, padding: '0 40px', flexDirection: 'row', alignItems: 'center', justifyContent: 'space-between' }}&gt;&#10;        &lt;Text style={{ fontSize: 14, color: '#8B97A8' }}&gt;所以上一页那件事不是锦上添花，是这条机制能不能存在的前提&lt;/Text&gt;&#10;        &lt;Text style={{ fontSize: 16, fontWeight: 'bold', color: '#0E3F8C' }}&gt;10 / 15&lt;/Text&gt;&#10;    &lt;/Box&gt;&#10;&lt;/Slide&gt;&#10;"/>
+        <p:cNvPr id="13" name=""/>
         <p:cNvGrpSpPr/>
         <p:nvPr/>
       </p:nvGrpSpPr>
@@ -1848,7 +1764,10 @@
         </p:spPr>
         <p:txBody>
           <a:bodyPr/>
-          <a:p/>
+          <a:p>
+            <a:pPr/>
+            <a:endParaRPr/>
+          </a:p>
         </p:txBody>
       </p:sp>
       <p:sp>
@@ -1872,7 +1791,10 @@
         </p:spPr>
         <p:txBody>
           <a:bodyPr/>
-          <a:p/>
+          <a:p>
+            <a:pPr/>
+            <a:endParaRPr/>
+          </a:p>
         </p:txBody>
       </p:sp>
       <p:sp>
@@ -1988,7 +1910,10 @@
         </p:spPr>
         <p:txBody>
           <a:bodyPr/>
-          <a:p/>
+          <a:p>
+            <a:pPr/>
+            <a:endParaRPr/>
+          </a:p>
         </p:txBody>
       </p:sp>
       <p:sp>
@@ -2054,7 +1979,10 @@
         </p:spPr>
         <p:txBody>
           <a:bodyPr/>
-          <a:p/>
+          <a:p>
+            <a:pPr/>
+            <a:endParaRPr/>
+          </a:p>
         </p:txBody>
       </p:sp>
       <p:pic>
@@ -2272,7 +2200,10 @@
         </p:spPr>
         <p:txBody>
           <a:bodyPr/>
-          <a:p/>
+          <a:p>
+            <a:pPr/>
+            <a:endParaRPr/>
+          </a:p>
         </p:txBody>
       </p:sp>
       <p:sp>
@@ -2535,7 +2466,10 @@
         </p:spPr>
         <p:txBody>
           <a:bodyPr/>
-          <a:p/>
+          <a:p>
+            <a:pPr/>
+            <a:endParaRPr/>
+          </a:p>
         </p:txBody>
       </p:sp>
       <p:pic>
@@ -2679,7 +2613,10 @@
         </p:spPr>
         <p:txBody>
           <a:bodyPr/>
-          <a:p/>
+          <a:p>
+            <a:pPr/>
+            <a:endParaRPr/>
+          </a:p>
         </p:txBody>
       </p:sp>
       <p:sp>
@@ -2726,7 +2663,10 @@
         </p:spPr>
         <p:txBody>
           <a:bodyPr/>
-          <a:p/>
+          <a:p>
+            <a:pPr/>
+            <a:endParaRPr/>
+          </a:p>
         </p:txBody>
       </p:sp>
       <p:sp>
@@ -2889,7 +2829,10 @@
         </p:spPr>
         <p:txBody>
           <a:bodyPr/>
-          <a:p/>
+          <a:p>
+            <a:pPr/>
+            <a:endParaRPr/>
+          </a:p>
         </p:txBody>
       </p:sp>
       <p:sp>
@@ -3066,7 +3009,10 @@
         </p:spPr>
         <p:txBody>
           <a:bodyPr/>
-          <a:p/>
+          <a:p>
+            <a:pPr/>
+            <a:endParaRPr/>
+          </a:p>
         </p:txBody>
       </p:sp>
       <p:sp>
@@ -3334,7 +3280,7 @@
   <p:cSld>
     <p:spTree>
       <p:nvGrpSpPr>
-        <p:cNvPr id="45" name="" descr="&lt;Slide style={{ width: 1280, height: 720, display: 'flex', flexDirection: 'column', background: '#FFFFFF', fontFamily: &quot;'Microsoft YaHei', 'PingFang SC', 'Noto Sans CJK SC', sans-serif&quot;, padding: 0 }}&gt;&#10;    &lt;Box style={{ height: 72, background: '#0E3F8C', flexDirection: 'row', alignItems: 'center', justifyContent: 'space-between', padding: '0 40px' }}&gt;&#10;        &lt;Text style={{ fontSize: 20, fontWeight: 'bold', color: '#FFFFFF' }}&gt;Paper2Video 项目汇报&lt;/Text&gt;&#10;        &lt;Text style={{ fontSize: 16, color: '#8FB6E8', letterSpacing: 2 }}&gt;难点 3 / 4&lt;/Text&gt;&#10;    &lt;/Box&gt;&#10;&#10;    &lt;Box style={{ flex: 1, flexDirection: 'column', padding: '24px 40px', gap: 14 }}&gt;&#10;        &lt;Box style={{ height: 44, flexDirection: 'row', alignItems: 'center', gap: 16 }}&gt;&#10;            &lt;Box style={{ width: 5, height: 34, background: '#1E4FA8', borderRadius: 2 }} /&gt;&#10;            &lt;Text style={{ fontSize: 36, fontWeight: 'bold', color: '#0E3F8C' }}&gt;单卡 16GB 的连锁反应&lt;/Text&gt;&#10;        &lt;/Box&gt;&#10;&#10;        &lt;Box style={{ height: 56, background: '#E8EFF8', borderLeft: '4px solid #1E4FA8', borderRadius: 4, padding: '0 20px', flexDirection: 'row', alignItems: 'center', gap: 16 }}&gt;&#10;            &lt;Text style={{ fontSize: 15, fontWeight: 'bold', color: '#1E4FA8', letterSpacing: 1 }}&gt;先问一句&lt;/Text&gt;&#10;            &lt;Text style={{ fontSize: 19, color: '#1A2230' }}&gt;一条论文从结构化到出片，本机实测 27.2 分钟。时间到底花在哪一步？&lt;/Text&gt;&#10;        &lt;/Box&gt;&#10;&#10;        &lt;Box style={{ height: 290, background: '#F7F9FC', border: '1px solid #D6DCE5', borderRadius: 6, padding: '6px 12px' }}&gt;&#10;            &lt;Chart&#10;                style={{ width: '100%', height: 278 }}&#10;                chartType='barChart'&#10;                barDirection='bar'&#10;                title='各阶段真实耗时（分钟）'&#10;                titleColor='#0E3F8C'&#10;                showLegend={false}&#10;                showDataLabels={true}&#10;                axisColor='#8B97A8'&#10;                dataLabelColor='#1A2230'&#10;                colors={['#1E4FA8']}&#10;                data={[&#10;                    ['阶段', '耗时（分钟）'],&#10;                    ['数字人生成', 10.2],&#10;                    ['语音合成', 7.6],&#10;                    ['光标定位', 3.8],&#10;                    ['合成视频', 1.7],&#10;                    ['结构化正文', 1.4],&#10;                    ['生成幻灯片', 1.3],&#10;                    ['生成讲稿与光标描述', 1.1],&#10;                ]}&#10;            /&gt;&#10;        &lt;/Box&gt;&#10;&#10;        &lt;Box style={{ height: 118, background: '#F7F9FC', border: '1px solid #D6DCE5', borderRadius: 6, padding: '14px 20px', flexDirection: 'row', gap: 24, alignItems: 'center' }}&gt;&#10;            &lt;Box style={{ flexDirection: 'column', gap: 3 }}&gt;&#10;                &lt;Text style={{ fontSize: 40, fontWeight: 'bold', color: '#1E4FA8', lineHeight: 1.05 }}&gt;3.8&lt;/Text&gt;&#10;                &lt;Text style={{ fontSize: 14, color: '#4A5568', lineHeight: 1.35 }}&gt;联网的&lt;br /&gt;分钟数&lt;/Text&gt;&#10;            &lt;/Box&gt;&#10;            &lt;Box style={{ width: 1, height: 66, background: '#D6DCE5' }} /&gt;&#10;            &lt;Box style={{ flexDirection: 'column', gap: 3 }}&gt;&#10;                &lt;Text style={{ fontSize: 40, fontWeight: 'bold', color: '#8B97A8', lineHeight: 1.05 }}&gt;23.3&lt;/Text&gt;&#10;                &lt;Text style={{ fontSize: 14, color: '#4A5568', lineHeight: 1.35 }}&gt;本机 GPU 的&lt;br /&gt;分钟数&lt;/Text&gt;&#10;            &lt;/Box&gt;&#10;            &lt;Box style={{ width: 1, height: 66, background: '#D6DCE5' }} /&gt;&#10;            &lt;Text style={{ flex: 1, fontSize: 16, color: '#1A2230', lineHeight: 1.45 }}&gt;论文用多进程池把各页摊到 8 张卡上并行，每个进程各持一份完整权重——这在单卡上必然爆显存，只能改成串行、按阶段加载再卸载。峰值显存从 24GB 以上压到约 10GB，代价就是那个 6 倍加速我拿不到。搬到多卡服务器上，这个并行应该加回来。&lt;/Text&gt;&#10;        &lt;/Box&gt;&#10;    &lt;/Box&gt;&#10;&#10;    &lt;Box style={{ height: 48, padding: '0 40px', flexDirection: 'row', alignItems: 'center', justifyContent: 'space-between' }}&gt;&#10;        &lt;Text style={{ fontSize: 14, color: '#8B97A8' }}&gt;数据来源：一次完整跑通的任务日志（result 与 job 记录一致）&lt;/Text&gt;&#10;        &lt;Text style={{ fontSize: 16, fontWeight: 'bold', color: '#0E3F8C' }}&gt;11 / 15&lt;/Text&gt;&#10;    &lt;/Box&gt;&#10;&lt;/Slide&gt;&#10;"/>
+        <p:cNvPr id="45" name=""/>
         <p:cNvGrpSpPr/>
         <p:nvPr/>
       </p:nvGrpSpPr>
@@ -3367,7 +3313,10 @@
         </p:spPr>
         <p:txBody>
           <a:bodyPr/>
-          <a:p/>
+          <a:p>
+            <a:pPr/>
+            <a:endParaRPr/>
+          </a:p>
         </p:txBody>
       </p:sp>
       <p:sp>
@@ -3391,7 +3340,10 @@
         </p:spPr>
         <p:txBody>
           <a:bodyPr/>
-          <a:p/>
+          <a:p>
+            <a:pPr/>
+            <a:endParaRPr/>
+          </a:p>
         </p:txBody>
       </p:sp>
       <p:sp>
@@ -3507,7 +3459,10 @@
         </p:spPr>
         <p:txBody>
           <a:bodyPr/>
-          <a:p/>
+          <a:p>
+            <a:pPr/>
+            <a:endParaRPr/>
+          </a:p>
         </p:txBody>
       </p:sp>
       <p:sp>
@@ -3588,7 +3543,10 @@
         </p:spPr>
         <p:txBody>
           <a:bodyPr/>
-          <a:p/>
+          <a:p>
+            <a:pPr/>
+            <a:endParaRPr/>
+          </a:p>
         </p:txBody>
       </p:sp>
       <p:sp>
@@ -3635,7 +3593,10 @@
         </p:spPr>
         <p:txBody>
           <a:bodyPr/>
-          <a:p/>
+          <a:p>
+            <a:pPr/>
+            <a:endParaRPr/>
+          </a:p>
         </p:txBody>
       </p:sp>
       <p:sp>
@@ -3756,7 +3717,10 @@
         </p:spPr>
         <p:txBody>
           <a:bodyPr/>
-          <a:p/>
+          <a:p>
+            <a:pPr/>
+            <a:endParaRPr/>
+          </a:p>
         </p:txBody>
       </p:sp>
       <p:graphicFrame>
@@ -3803,7 +3767,10 @@
         </p:spPr>
         <p:txBody>
           <a:bodyPr/>
-          <a:p/>
+          <a:p>
+            <a:pPr/>
+            <a:endParaRPr/>
+          </a:p>
         </p:txBody>
       </p:sp>
       <p:sp>
@@ -3915,7 +3882,10 @@
         </p:spPr>
         <p:txBody>
           <a:bodyPr/>
-          <a:p/>
+          <a:p>
+            <a:pPr/>
+            <a:endParaRPr/>
+          </a:p>
         </p:txBody>
       </p:sp>
       <p:sp>
@@ -4047,7 +4017,10 @@
         </p:spPr>
         <p:txBody>
           <a:bodyPr/>
-          <a:p/>
+          <a:p>
+            <a:pPr/>
+            <a:endParaRPr/>
+          </a:p>
         </p:txBody>
       </p:sp>
       <p:sp>
@@ -4287,7 +4260,7 @@
   <p:cSld>
     <p:spTree>
       <p:nvGrpSpPr>
-        <p:cNvPr id="68" name="" descr="&lt;Slide style={{ width: 1280, height: 720, display: 'flex', flexDirection: 'column', background: '#FFFFFF', fontFamily: &quot;'Microsoft YaHei', 'PingFang SC', 'Noto Sans CJK SC', sans-serif&quot;, padding: 0 }}&gt;&#10;    &lt;Box style={{ height: 72, background: '#0E3F8C', flexDirection: 'row', alignItems: 'center', justifyContent: 'space-between', padding: '0 40px' }}&gt;&#10;        &lt;Text style={{ fontSize: 20, fontWeight: 'bold', color: '#FFFFFF' }}&gt;Paper2Video 项目汇报&lt;/Text&gt;&#10;        &lt;Text style={{ fontSize: 16, color: '#8FB6E8', letterSpacing: 2 }}&gt;难点 4 / 4&lt;/Text&gt;&#10;    &lt;/Box&gt;&#10;&#10;    &lt;Box style={{ flex: 1, flexDirection: 'column', padding: '24px 40px', gap: 16 }}&gt;&#10;        &lt;Box style={{ height: 44, flexDirection: 'row', alignItems: 'center', gap: 16 }}&gt;&#10;            &lt;Box style={{ width: 5, height: 34, background: '#1E4FA8', borderRadius: 2 }} /&gt;&#10;            &lt;Text style={{ fontSize: 36, fontWeight: 'bold', color: '#0E3F8C' }}&gt;程序说成功，产物是坏的&lt;/Text&gt;&#10;        &lt;/Box&gt;&#10;&#10;        &lt;Box style={{ height: 492, flexDirection: 'row', gap: 24 }}&gt;&#10;            &lt;Box style={{ width: 780, height: 492, flexDirection: 'column', gap: 20 }}&gt;&#10;                &lt;Box style={{ height: 236, background: '#F7F9FC', border: '1px solid #D6DCE5', borderRadius: 6, padding: '16px 18px', flexDirection: 'column', gap: 12 }}&gt;&#10;                    &lt;Box style={{ flexDirection: 'row', alignItems: 'center', gap: 10 }}&gt;&#10;                        &lt;Box style={{ width: 5, height: 26, background: '#D9534F', borderRadius: 2 }} /&gt;&#10;                        &lt;Text style={{ fontSize: 21, fontWeight: 'bold', color: '#1A2230' }}&gt;一、写幻灯片源码的时候&lt;/Text&gt;&#10;                    &lt;/Box&gt;&#10;                    &lt;Box style={{ flex: 1, flexDirection: 'row', gap: 16 }}&gt;&#10;                        &lt;Box style={{ flex: 1, background: '#FFFFFF', border: '1px solid #D6DCE5', borderRadius: 4, padding: '12px 14px', flexDirection: 'column', gap: 6 }}&gt;&#10;                            &lt;Text style={{ fontSize: 14, fontWeight: 'bold', color: '#8B97A8', letterSpacing: 1 }}&gt;程序说&lt;/Text&gt;&#10;                            &lt;Text style={{ fontSize: 17, color: '#4A5568', lineHeight: 1.45 }}&gt;编译退出码 0，只在日志里留下一行&quot;有非法字节被替换成替换字符&quot;的提示&lt;/Text&gt;&#10;                        &lt;/Box&gt;&#10;                        &lt;Box style={{ flex: 1, background: '#FCEBEB', border: '1px solid #F7C1C1', borderRadius: 4, padding: '12px 14px', flexDirection: 'column', gap: 6 }}&gt;&#10;                            &lt;Text style={{ fontSize: 14, fontWeight: 'bold', color: '#A32D2D', letterSpacing: 1 }}&gt;实际是&lt;/Text&gt;&#10;                            &lt;Text style={{ fontSize: 17, color: '#1A2230', lineHeight: 1.45 }}&gt;渲染出来的 PDF 里中文全部消失——从 PDF 里回抽文字，三个中文判据全是假&lt;/Text&gt;&#10;                        &lt;/Box&gt;&#10;                    &lt;/Box&gt;&#10;                &lt;/Box&gt;&#10;&#10;                &lt;Box style={{ height: 236, background: '#F7F9FC', border: '1px solid #D6DCE5', borderRadius: 6, padding: '16px 18px', flexDirection: 'column', gap: 12 }}&gt;&#10;                    &lt;Box style={{ flexDirection: 'row', alignItems: 'center', gap: 10 }}&gt;&#10;                        &lt;Box style={{ width: 5, height: 26, background: '#D9534F', borderRadius: 2 }} /&gt;&#10;                        &lt;Text style={{ fontSize: 21, fontWeight: 'bold', color: '#1A2230' }}&gt;二、生成数字人的时候&lt;/Text&gt;&#10;                    &lt;/Box&gt;&#10;                    &lt;Box style={{ flex: 1, flexDirection: 'row', gap: 16 }}&gt;&#10;                        &lt;Box style={{ flex: 1, background: '#FFFFFF', border: '1px solid #D6DCE5', borderRadius: 4, padding: '12px 14px', flexDirection: 'column', gap: 6 }}&gt;&#10;                            &lt;Text style={{ fontSize: 14, fontWeight: 'bold', color: '#8B97A8', letterSpacing: 1 }}&gt;程序说&lt;/Text&gt;&#10;                            &lt;Text style={{ fontSize: 17, color: '#4A5568', lineHeight: 1.45 }}&gt;打印&quot;结果已保存&quot;，耗时也正常，没有任何异常堆栈&lt;/Text&gt;&#10;                        &lt;/Box&gt;&#10;                        &lt;Box style={{ flex: 1, background: '#FCEBEB', border: '1px solid #F7C1C1', borderRadius: 4, padding: '12px 14px', flexDirection: 'column', gap: 6 }}&gt;&#10;                            &lt;Text style={{ fontSize: 14, fontWeight: 'bold', color: '#A32D2D', letterSpacing: 1 }}&gt;实际是&lt;/Text&gt;&#10;                            &lt;Text style={{ fontSize: 17, color: '#1A2230', lineHeight: 1.45 }}&gt;产物是一个 0 字节的空文件——整批页都&quot;跑完了&quot;，却一页都没生成出来&lt;/Text&gt;&#10;                        &lt;/Box&gt;&#10;                    &lt;/Box&gt;&#10;                &lt;/Box&gt;&#10;            &lt;/Box&gt;&#10;&#10;            &lt;Box style={{ width: 396, height: 492, flexDirection: 'column', gap: 14 }}&gt;&#10;                &lt;Box style={{ height: 176, background: '#0E3F8C', borderRadius: 8, padding: '22px 24px', flexDirection: 'column', justifyContent: 'center', gap: 8 }}&gt;&#10;                    &lt;Text style={{ fontSize: 15, color: '#8FB6E8', letterSpacing: 2 }}&gt;两次都指向同一条判据&lt;/Text&gt;&#10;                    &lt;Text style={{ fontSize: 26, fontWeight: 'bold', color: '#FFFFFF', lineHeight: 1.3 }}&gt;退出码 0&lt;br /&gt;不等于内容正确&lt;/Text&gt;&#10;                &lt;/Box&gt;&#10;&#10;                &lt;Box style={{ flex: 1, background: '#F7F9FC', border: '1px solid #D6DCE5', borderRadius: 6, padding: '14px 16px', flexDirection: 'column', gap: 8, justifyContent: 'center' }}&gt;&#10;                    &lt;Text style={{ fontSize: 18, fontWeight: 'bold', color: '#1E4FA8' }}&gt;为什么这一类最危险&lt;/Text&gt;&#10;                    &lt;Text style={{ fontSize: 15, color: '#4A5568', lineHeight: 1.45 }}&gt;崩溃会停下来，它不会。它带着坏产物继续往下走，一直混进成片里，而进度条上看不出任何异常。&lt;/Text&gt;&#10;                    &lt;Box style={{ height: 1, background: '#D6DCE5' }} /&gt;&#10;                    &lt;Text style={{ fontSize: 18, fontWeight: 'bold', color: '#1E4FA8' }}&gt;后来的做法&lt;/Text&gt;&#10;                    &lt;Text style={{ fontSize: 15, color: '#4A5568', lineHeight: 1.45 }}&gt;凡是调外部工具的环节，都在结果侧再取一次样：从生成的 PDF 里把文字抽出来，查关键字符串还在不在。&lt;/Text&gt;&#10;                &lt;/Box&gt;&#10;            &lt;/Box&gt;&#10;        &lt;/Box&gt;&#10;    &lt;/Box&gt;&#10;&#10;    &lt;Box style={{ height: 48, padding: '0 40px', flexDirection: 'row', alignItems: 'center', justifyContent: 'space-between' }}&gt;&#10;        &lt;Text style={{ fontSize: 14, color: '#8B97A8' }}&gt;数字人那个坑的成因：人脸裁剪框的宽高是奇数时，编码器直接拒绝工作&lt;/Text&gt;&#10;        &lt;Text style={{ fontSize: 16, fontWeight: 'bold', color: '#0E3F8C' }}&gt;12 / 15&lt;/Text&gt;&#10;    &lt;/Box&gt;&#10;&lt;/Slide&gt;&#10;"/>
+        <p:cNvPr id="68" name=""/>
         <p:cNvGrpSpPr/>
         <p:nvPr/>
       </p:nvGrpSpPr>
@@ -4320,7 +4293,10 @@
         </p:spPr>
         <p:txBody>
           <a:bodyPr/>
-          <a:p/>
+          <a:p>
+            <a:pPr/>
+            <a:endParaRPr/>
+          </a:p>
         </p:txBody>
       </p:sp>
       <p:sp>
@@ -4344,7 +4320,10 @@
         </p:spPr>
         <p:txBody>
           <a:bodyPr/>
-          <a:p/>
+          <a:p>
+            <a:pPr/>
+            <a:endParaRPr/>
+          </a:p>
         </p:txBody>
       </p:sp>
       <p:sp>
@@ -4460,7 +4439,10 @@
         </p:spPr>
         <p:txBody>
           <a:bodyPr/>
-          <a:p/>
+          <a:p>
+            <a:pPr/>
+            <a:endParaRPr/>
+          </a:p>
         </p:txBody>
       </p:sp>
       <p:sp>
@@ -4526,7 +4508,10 @@
         </p:spPr>
         <p:txBody>
           <a:bodyPr/>
-          <a:p/>
+          <a:p>
+            <a:pPr/>
+            <a:endParaRPr/>
+          </a:p>
         </p:txBody>
       </p:sp>
       <p:sp>
@@ -4552,7 +4537,10 @@
         </p:spPr>
         <p:txBody>
           <a:bodyPr/>
-          <a:p/>
+          <a:p>
+            <a:pPr/>
+            <a:endParaRPr/>
+          </a:p>
         </p:txBody>
       </p:sp>
       <p:sp>
@@ -4618,7 +4606,10 @@
         </p:spPr>
         <p:txBody>
           <a:bodyPr/>
-          <a:p/>
+          <a:p>
+            <a:pPr/>
+            <a:endParaRPr/>
+          </a:p>
         </p:txBody>
       </p:sp>
       <p:sp>
@@ -4781,7 +4772,10 @@
         </p:spPr>
         <p:txBody>
           <a:bodyPr/>
-          <a:p/>
+          <a:p>
+            <a:pPr/>
+            <a:endParaRPr/>
+          </a:p>
         </p:txBody>
       </p:sp>
       <p:sp>
@@ -4924,7 +4918,10 @@
         </p:spPr>
         <p:txBody>
           <a:bodyPr/>
-          <a:p/>
+          <a:p>
+            <a:pPr/>
+            <a:endParaRPr/>
+          </a:p>
         </p:txBody>
       </p:sp>
       <p:sp>
@@ -4950,7 +4947,10 @@
         </p:spPr>
         <p:txBody>
           <a:bodyPr/>
-          <a:p/>
+          <a:p>
+            <a:pPr/>
+            <a:endParaRPr/>
+          </a:p>
         </p:txBody>
       </p:sp>
       <p:sp>
@@ -5016,7 +5016,10 @@
         </p:spPr>
         <p:txBody>
           <a:bodyPr/>
-          <a:p/>
+          <a:p>
+            <a:pPr/>
+            <a:endParaRPr/>
+          </a:p>
         </p:txBody>
       </p:sp>
       <p:sp>
@@ -5159,7 +5162,10 @@
         </p:spPr>
         <p:txBody>
           <a:bodyPr/>
-          <a:p/>
+          <a:p>
+            <a:pPr/>
+            <a:endParaRPr/>
+          </a:p>
         </p:txBody>
       </p:sp>
       <p:sp>
@@ -5317,7 +5323,10 @@
         </p:spPr>
         <p:txBody>
           <a:bodyPr/>
-          <a:p/>
+          <a:p>
+            <a:pPr/>
+            <a:endParaRPr/>
+          </a:p>
         </p:txBody>
       </p:sp>
       <p:sp>
@@ -5446,7 +5455,10 @@
         </p:spPr>
         <p:txBody>
           <a:bodyPr/>
-          <a:p/>
+          <a:p>
+            <a:pPr/>
+            <a:endParaRPr/>
+          </a:p>
         </p:txBody>
       </p:sp>
       <p:sp>
@@ -5542,7 +5554,10 @@
         </p:spPr>
         <p:txBody>
           <a:bodyPr/>
-          <a:p/>
+          <a:p>
+            <a:pPr/>
+            <a:endParaRPr/>
+          </a:p>
         </p:txBody>
       </p:sp>
       <p:sp>
@@ -5717,7 +5732,7 @@
   <p:cSld>
     <p:spTree>
       <p:nvGrpSpPr>
-        <p:cNvPr id="104" name="" descr="&lt;Slide style={{ width: 1280, height: 720, display: 'flex', flexDirection: 'column', background: '#FFFFFF', fontFamily: &quot;'Microsoft YaHei', 'PingFang SC', 'Noto Sans CJK SC', sans-serif&quot;, padding: 0 }}&gt;&#10;    &lt;Box style={{ height: 72, background: '#0E3F8C', flexDirection: 'row', alignItems: 'center', justifyContent: 'space-between', padding: '0 40px' }}&gt;&#10;        &lt;Text style={{ fontSize: 20, fontWeight: 'bold', color: '#FFFFFF' }}&gt;Paper2Video 项目汇报&lt;/Text&gt;&#10;        &lt;Text style={{ fontSize: 16, color: '#8FB6E8', letterSpacing: 2 }}&gt;成果&lt;/Text&gt;&#10;    &lt;/Box&gt;&#10;&#10;    &lt;Box style={{ flex: 1, flexDirection: 'column', padding: '24px 40px', gap: 14 }}&gt;&#10;        &lt;Box style={{ height: 44, flexDirection: 'row', alignItems: 'center', gap: 16 }}&gt;&#10;            &lt;Box style={{ width: 5, height: 34, background: '#1E4FA8', borderRadius: 2 }} /&gt;&#10;            &lt;Text style={{ fontSize: 36, fontWeight: 'bold', color: '#0E3F8C' }}&gt;拿得出来的东西&lt;/Text&gt;&#10;            &lt;Text style={{ fontSize: 17, color: '#8B97A8', marginLeft: 6 }}&gt;这一页不放示意图，下面这一栏是跑出来的帧&lt;/Text&gt;&#10;        &lt;/Box&gt;&#10;&#10;        &lt;Box style={{ height: 292, background: '#F7F9FC', border: '1px solid #D6DCE5', borderRadius: 6, padding: 4, flexDirection: 'column', justifyContent: 'center' }}&gt;&#10;            &lt;Image src='assets/dh_filmstrip.png' style={{ width: 1192, height: 284, objectFit: 'contain' }} /&gt;&#10;        &lt;/Box&gt;&#10;&#10;        &lt;Box style={{ height: 184, flexDirection: 'row', gap: 20 }}&gt;&#10;            &lt;Box style={{ width: 386, height: 184, background: '#F7F9FC', border: '1px solid #D6DCE5', borderRadius: 6, padding: '16px 18px', flexDirection: 'column', justifyContent: 'space-between' }}&gt;&#10;                &lt;Box style={{ flexDirection: 'column', gap: 2 }}&gt;&#10;                    &lt;Text style={{ fontSize: 18, color: '#4A5568', letterSpacing: 1 }}&gt;自动化断言&lt;/Text&gt;&#10;                    &lt;Text style={{ fontSize: 42, fontWeight: 'bold', color: '#1E4FA8', lineHeight: 1.05 }}&gt;310 项&lt;/Text&gt;&#10;                    &lt;Text style={{ fontSize: 15, color: '#4A5568', lineHeight: 1.4 }}&gt;分 14 组覆盖接口与流程，跑一次不消耗 API 额度&lt;/Text&gt;&#10;                &lt;/Box&gt;&#10;                &lt;Text style={{ fontSize: 14, color: '#8B97A8' }}&gt;其中含专门的反面对照组&lt;/Text&gt;&#10;            &lt;/Box&gt;&#10;&#10;            &lt;Box style={{ width: 386, height: 184, background: '#F7F9FC', border: '1px solid #D6DCE5', borderRadius: 6, padding: '16px 18px', flexDirection: 'column', justifyContent: 'space-between' }}&gt;&#10;                &lt;Box style={{ flexDirection: 'column', gap: 2 }}&gt;&#10;                    &lt;Text style={{ fontSize: 18, color: '#4A5568', letterSpacing: 1 }}&gt;生成出来的视频文件&lt;/Text&gt;&#10;                    &lt;Text style={{ fontSize: 42, fontWeight: 'bold', color: '#1E4FA8', lineHeight: 1.05 }}&gt;189 个&lt;/Text&gt;&#10;                    &lt;Text style={{ fontSize: 15, color: '#4A5568', lineHeight: 1.4 }}&gt;含 15 段数字人逐页片段，成片由它们拼接而成&lt;/Text&gt;&#10;                &lt;/Box&gt;&#10;                &lt;Text style={{ fontSize: 14, color: '#8B97A8' }}&gt;另有 7 张真实渲染的幻灯片&lt;/Text&gt;&#10;            &lt;/Box&gt;&#10;&#10;            &lt;Box style={{ width: 388, height: 184, background: '#E8EFF8', border: '1px dashed #1E4FA8', borderRadius: 6, padding: '16px 18px', flexDirection: 'column', justifyContent: 'space-between' }}&gt;&#10;                &lt;Box style={{ flexDirection: 'column', gap: 4 }}&gt;&#10;                    &lt;Text style={{ fontSize: 18, color: '#1E4FA8', letterSpacing: 1 }}&gt;完整成片&lt;/Text&gt;&#10;                    &lt;Text style={{ fontSize: 22, fontWeight: 'bold', color: '#0E3F8C' }}&gt;待放入&lt;/Text&gt;&#10;                    &lt;Text style={{ fontSize: 15, color: '#4A5568', lineHeight: 1.45 }}&gt;把拼好的视频放进项目目录后，替换这一格并放一张封面帧&lt;/Text&gt;&#10;                &lt;/Box&gt;&#10;                &lt;Text style={{ fontSize: 14, color: '#1E4FA8' }}&gt;目前只有逐页片段，尚未整体拼接&lt;/Text&gt;&#10;            &lt;/Box&gt;&#10;        &lt;/Box&gt;&#10;    &lt;/Box&gt;&#10;&#10;    &lt;Box style={{ height: 48, padding: '0 40px', flexDirection: 'row', alignItems: 'center', justifyContent: 'space-between' }}&gt;&#10;        &lt;Text style={{ fontSize: 14, color: '#8B97A8' }}&gt;数字人帧抽自本机产出的逐页片段（第 1、4、7、10、13、15 页）&lt;/Text&gt;&#10;        &lt;Text style={{ fontSize: 16, fontWeight: 'bold', color: '#0E3F8C' }}&gt;13 / 15&lt;/Text&gt;&#10;    &lt;/Box&gt;&#10;&lt;/Slide&gt;&#10;"/>
+        <p:cNvPr id="104" name=""/>
         <p:cNvGrpSpPr/>
         <p:nvPr/>
       </p:nvGrpSpPr>
@@ -5750,7 +5765,10 @@
         </p:spPr>
         <p:txBody>
           <a:bodyPr/>
-          <a:p/>
+          <a:p>
+            <a:pPr/>
+            <a:endParaRPr/>
+          </a:p>
         </p:txBody>
       </p:sp>
       <p:sp>
@@ -5774,7 +5792,10 @@
         </p:spPr>
         <p:txBody>
           <a:bodyPr/>
-          <a:p/>
+          <a:p>
+            <a:pPr/>
+            <a:endParaRPr/>
+          </a:p>
         </p:txBody>
       </p:sp>
       <p:sp>
@@ -5880,7 +5901,10 @@
         </p:spPr>
         <p:txBody>
           <a:bodyPr/>
-          <a:p/>
+          <a:p>
+            <a:pPr/>
+            <a:endParaRPr/>
+          </a:p>
         </p:txBody>
       </p:sp>
       <p:sp>
@@ -5981,7 +6005,10 @@
         </p:spPr>
         <p:txBody>
           <a:bodyPr/>
-          <a:p/>
+          <a:p>
+            <a:pPr/>
+            <a:endParaRPr/>
+          </a:p>
         </p:txBody>
       </p:sp>
       <p:pic>
@@ -6038,7 +6065,10 @@
         </p:spPr>
         <p:txBody>
           <a:bodyPr/>
-          <a:p/>
+          <a:p>
+            <a:pPr/>
+            <a:endParaRPr/>
+          </a:p>
         </p:txBody>
       </p:sp>
       <p:sp>
@@ -6259,7 +6289,10 @@
         </p:spPr>
         <p:txBody>
           <a:bodyPr/>
-          <a:p/>
+          <a:p>
+            <a:pPr/>
+            <a:endParaRPr/>
+          </a:p>
         </p:txBody>
       </p:sp>
       <p:sp>
@@ -6480,7 +6513,10 @@
         </p:spPr>
         <p:txBody>
           <a:bodyPr/>
-          <a:p/>
+          <a:p>
+            <a:pPr/>
+            <a:endParaRPr/>
+          </a:p>
         </p:txBody>
       </p:sp>
       <p:sp>
@@ -6825,7 +6861,7 @@
   <p:cSld>
     <p:spTree>
       <p:nvGrpSpPr>
-        <p:cNvPr id="131" name="" descr="&lt;Slide style={{ width: 1280, height: 720, display: 'flex', flexDirection: 'column', background: '#FFFFFF', fontFamily: &quot;'Microsoft YaHei', 'PingFang SC', 'Noto Sans CJK SC', sans-serif&quot;, padding: 0 }}&gt;&#10;    &lt;Box style={{ height: 72, background: '#0E3F8C', flexDirection: 'row', alignItems: 'center', justifyContent: 'space-between', padding: '0 40px' }}&gt;&#10;        &lt;Text style={{ fontSize: 20, fontWeight: 'bold', color: '#FFFFFF' }}&gt;Paper2Video 项目汇报&lt;/Text&gt;&#10;        &lt;Text style={{ fontSize: 16, color: '#8FB6E8', letterSpacing: 2 }}&gt;复盘&lt;/Text&gt;&#10;    &lt;/Box&gt;&#10;&#10;    &lt;Box style={{ flex: 1, flexDirection: 'column', padding: '24px 40px', gap: 16 }}&gt;&#10;        &lt;Box style={{ height: 44, flexDirection: 'row', alignItems: 'center', gap: 16 }}&gt;&#10;            &lt;Box style={{ width: 5, height: 34, background: '#1E4FA8', borderRadius: 2 }} /&gt;&#10;            &lt;Text style={{ fontSize: 36, fontWeight: 'bold', color: '#0E3F8C' }}&gt;三件事分开说&lt;/Text&gt;&#10;            &lt;Text style={{ fontSize: 17, color: '#8B97A8', marginLeft: 6 }}&gt;哪是我的功劳，哪是运气，哪是我记错了&lt;/Text&gt;&#10;        &lt;/Box&gt;&#10;&#10;        &lt;Box style={{ height: 492, flexDirection: 'row', gap: 24 }}&gt;&#10;            &lt;Box style={{ width: 380, height: 492, background: '#F7F9FC', borderLeft: '5px solid #1E4FA8', borderRadius: 6, padding: '30px 26px', flexDirection: 'column', justifyContent: 'space-between' }}&gt;&#10;                &lt;Text style={{ fontSize: 15, color: '#1E4FA8', letterSpacing: 3 }}&gt;复盘&lt;/Text&gt;&#10;&#10;                &lt;Box style={{ flexDirection: 'column', gap: 14 }}&gt;&#10;                    &lt;Box style={{ flexDirection: 'row', alignItems: 'center', gap: 12 }}&gt;&#10;                        &lt;Box style={{ width: 30, height: 30, background: '#1E4FA8', borderRadius: 4, alignItems: 'center', justifyContent: 'center' }}&gt;&#10;                            &lt;Text style={{ fontSize: 15, fontWeight: 'bold', color: '#FFFFFF' }}&gt;01&lt;/Text&gt;&#10;                        &lt;/Box&gt;&#10;                        &lt;Text style={{ fontSize: 19, fontWeight: 'bold', color: '#1A2230' }}&gt;做对的&lt;/Text&gt;&#10;                    &lt;/Box&gt;&#10;                    &lt;Box style={{ flexDirection: 'row', alignItems: 'center', gap: 12 }}&gt;&#10;                        &lt;Box style={{ width: 30, height: 30, background: '#8B97A8', borderRadius: 4, alignItems: 'center', justifyContent: 'center' }}&gt;&#10;                            &lt;Text style={{ fontSize: 15, fontWeight: 'bold', color: '#FFFFFF' }}&gt;02&lt;/Text&gt;&#10;                        &lt;/Box&gt;&#10;                        &lt;Text style={{ fontSize: 19, fontWeight: 'bold', color: '#1A2230' }}&gt;靠运气的&lt;/Text&gt;&#10;                    &lt;/Box&gt;&#10;                    &lt;Box style={{ flexDirection: 'row', alignItems: 'center', gap: 12 }}&gt;&#10;                        &lt;Box style={{ width: 30, height: 30, background: '#D9534F', borderRadius: 4, alignItems: 'center', justifyContent: 'center' }}&gt;&#10;                            &lt;Text style={{ fontSize: 15, fontWeight: 'bold', color: '#FFFFFF' }}&gt;03&lt;/Text&gt;&#10;                        &lt;/Box&gt;&#10;                        &lt;Text style={{ fontSize: 19, fontWeight: 'bold', color: '#1A2230' }}&gt;记错的&lt;/Text&gt;&#10;                    &lt;/Box&gt;&#10;                &lt;/Box&gt;&#10;&#10;                &lt;Text style={{ fontSize: 15, color: '#4A5568', lineHeight: 1.5 }}&gt;这一页按这三类划分。把不属于自己的功劳认领了，比说错一个数更麻烦。&lt;/Text&gt;&#10;            &lt;/Box&gt;&#10;&#10;            &lt;Box style={{ width: 796, height: 492, flexDirection: 'column', gap: 12 }}&gt;&#10;                &lt;Box style={{ flex: 1, background: '#FFFFFF', border: '1px solid #D6DCE5', borderLeft: '4px solid #1E4FA8', borderRadius: 6, padding: '14px 18px', flexDirection: 'column', gap: 6, justifyContent: 'center' }}&gt;&#10;                    &lt;Text style={{ fontSize: 21, fontWeight: 'bold', color: '#0E3F8C' }}&gt;把一条判据留下来了&lt;/Text&gt;&#10;                    &lt;Text style={{ fontSize: 16, color: '#4A5568', lineHeight: 1.45 }}&gt;&quot;退出码 0 不等于内容正确&quot;——凡是要调外部工具的环节，都在结果侧再取一次样。改过的地方也都配了自检脚本，环境重装之后一条命令就能验回来。&lt;/Text&gt;&#10;                &lt;/Box&gt;&#10;&#10;                &lt;Box style={{ flex: 1, background: '#FFFFFF', border: '1px solid #D6DCE5', borderLeft: '4px solid #8B97A8', borderRadius: 6, padding: '14px 18px', flexDirection: 'column', gap: 6, justifyContent: 'center' }}&gt;&#10;                    &lt;Text style={{ fontSize: 21, fontWeight: 'bold', color: '#1A2230' }}&gt;换 API 那一步几乎没改代码，这是运气&lt;/Text&gt;&#10;                    &lt;Text style={{ fontSize: 16, color: '#4A5568', lineHeight: 1.45 }}&gt;上游那个取模型配置的函数本来就写了兜底分支，换模型只要传个参数。省下来的工作量不是我做出来的，我把这一点写进了文档，免得被当成工作量。&lt;/Text&gt;&#10;                &lt;/Box&gt;&#10;&#10;                &lt;Box style={{ flex: 1, background: '#FCEBEB', border: '1px solid #F7C1C1', borderLeft: '4px solid #D9534F', borderRadius: 6, padding: '14px 18px', flexDirection: 'column', gap: 6, justifyContent: 'center' }}&gt;&#10;                    &lt;Text style={{ fontSize: 21, fontWeight: 'bold', color: '#A32D2D' }}&gt;两个错误在笔记里记了很久&lt;/Text&gt;&#10;                    &lt;Text style={{ fontSize: 16, color: '#1A2230', lineHeight: 1.45 }}&gt;一个是&quot;上游代码被忽略、不要改&quot;，实际它一直在版本控制里——照这个理解我会白白重打一遍补丁。另一个是数字人的型号：两份文档写的不是同一个，而代码里的默认值是第三个。两处都是翻代码才发现的。&lt;/Text&gt;&#10;                &lt;/Box&gt;&#10;            &lt;/Box&gt;&#10;        &lt;/Box&gt;&#10;    &lt;/Box&gt;&#10;&#10;    &lt;Box style={{ height: 48, padding: '0 40px', flexDirection: 'row', alignItems: 'center', justifyContent: 'space-between' }}&gt;&#10;        &lt;Text style={{ fontSize: 14, color: '#8B97A8' }}&gt;已按核实结果修正两处记录，并同步到文档与项目笔记&lt;/Text&gt;&#10;        &lt;Text style={{ fontSize: 16, fontWeight: 'bold', color: '#0E3F8C' }}&gt;14 / 15&lt;/Text&gt;&#10;    &lt;/Box&gt;&#10;&lt;/Slide&gt;&#10;"/>
+        <p:cNvPr id="131" name=""/>
         <p:cNvGrpSpPr/>
         <p:nvPr/>
       </p:nvGrpSpPr>
@@ -6858,7 +6894,10 @@
         </p:spPr>
         <p:txBody>
           <a:bodyPr/>
-          <a:p/>
+          <a:p>
+            <a:pPr/>
+            <a:endParaRPr/>
+          </a:p>
         </p:txBody>
       </p:sp>
       <p:sp>
@@ -6882,7 +6921,10 @@
         </p:spPr>
         <p:txBody>
           <a:bodyPr/>
-          <a:p/>
+          <a:p>
+            <a:pPr/>
+            <a:endParaRPr/>
+          </a:p>
         </p:txBody>
       </p:sp>
       <p:sp>
@@ -6988,7 +7030,10 @@
         </p:spPr>
         <p:txBody>
           <a:bodyPr/>
-          <a:p/>
+          <a:p>
+            <a:pPr/>
+            <a:endParaRPr/>
+          </a:p>
         </p:txBody>
       </p:sp>
       <p:sp>
@@ -7084,7 +7129,10 @@
         </p:spPr>
         <p:txBody>
           <a:bodyPr/>
-          <a:p/>
+          <a:p>
+            <a:pPr/>
+            <a:endParaRPr/>
+          </a:p>
         </p:txBody>
       </p:sp>
       <p:sp>
@@ -7141,7 +7189,10 @@
         </p:spPr>
         <p:txBody>
           <a:bodyPr/>
-          <a:p/>
+          <a:p>
+            <a:pPr/>
+            <a:endParaRPr/>
+          </a:p>
         </p:txBody>
       </p:sp>
       <p:sp>
@@ -7202,7 +7253,10 @@
         </p:spPr>
         <p:txBody>
           <a:bodyPr/>
-          <a:p/>
+          <a:p>
+            <a:pPr/>
+            <a:endParaRPr/>
+          </a:p>
         </p:txBody>
       </p:sp>
       <p:sp>
@@ -7298,7 +7352,10 @@
         </p:spPr>
         <p:txBody>
           <a:bodyPr/>
-          <a:p/>
+          <a:p>
+            <a:pPr/>
+            <a:endParaRPr/>
+          </a:p>
         </p:txBody>
       </p:sp>
       <p:sp>
@@ -7394,7 +7451,10 @@
         </p:spPr>
         <p:txBody>
           <a:bodyPr/>
-          <a:p/>
+          <a:p>
+            <a:pPr/>
+            <a:endParaRPr/>
+          </a:p>
         </p:txBody>
       </p:sp>
       <p:sp>
@@ -7527,7 +7587,10 @@
         </p:spPr>
         <p:txBody>
           <a:bodyPr/>
-          <a:p/>
+          <a:p>
+            <a:pPr/>
+            <a:endParaRPr/>
+          </a:p>
         </p:txBody>
       </p:sp>
       <p:sp>
@@ -7584,7 +7647,10 @@
         </p:spPr>
         <p:txBody>
           <a:bodyPr/>
-          <a:p/>
+          <a:p>
+            <a:pPr/>
+            <a:endParaRPr/>
+          </a:p>
         </p:txBody>
       </p:sp>
       <p:sp>
@@ -7732,7 +7798,10 @@
         </p:spPr>
         <p:txBody>
           <a:bodyPr/>
-          <a:p/>
+          <a:p>
+            <a:pPr/>
+            <a:endParaRPr/>
+          </a:p>
         </p:txBody>
       </p:sp>
       <p:sp>
@@ -7789,7 +7858,10 @@
         </p:spPr>
         <p:txBody>
           <a:bodyPr/>
-          <a:p/>
+          <a:p>
+            <a:pPr/>
+            <a:endParaRPr/>
+          </a:p>
         </p:txBody>
       </p:sp>
       <p:sp>
@@ -7907,7 +7979,10 @@
         </p:spPr>
         <p:txBody>
           <a:bodyPr/>
-          <a:p/>
+          <a:p>
+            <a:pPr/>
+            <a:endParaRPr/>
+          </a:p>
         </p:txBody>
       </p:sp>
       <p:sp>
@@ -7964,7 +8039,10 @@
         </p:spPr>
         <p:txBody>
           <a:bodyPr/>
-          <a:p/>
+          <a:p>
+            <a:pPr/>
+            <a:endParaRPr/>
+          </a:p>
         </p:txBody>
       </p:sp>
       <p:sp>
@@ -8159,7 +8237,7 @@
   <p:cSld>
     <p:spTree>
       <p:nvGrpSpPr>
-        <p:cNvPr id="166" name="" descr="&lt;Slide style={{ width: 1280, height: 720, display: 'flex', flexDirection: 'column', background: '#0E3F8C', fontFamily: &quot;'Microsoft YaHei', 'PingFang SC', 'Noto Sans CJK SC', sans-serif&quot;, padding: 0 }}&gt;&#10;    &lt;Box style={{ height: 6, background: '#3D7BD9' }} /&gt;&#10;&#10;    &lt;Box style={{ flex: 1, flexDirection: 'column', padding: '46px 64px 0 64px', gap: 12 }}&gt;&#10;        &lt;Text style={{ fontSize: 50, fontWeight: 'bold', color: '#FFFFFF', lineHeight: 1.15 }}&gt;还没做的&lt;/Text&gt;&#10;        &lt;Text style={{ fontSize: 19, color: '#8FB6E8' }}&gt;下面四条都是能验证的，不是&quot;继续优化&quot;这种话&lt;/Text&gt;&#10;&#10;        &lt;Box style={{ height: 306, flexDirection: 'row', gap: 18, marginTop: 10 }}&gt;&#10;            &lt;Box style={{ width: 567, height: 306, flexDirection: 'column', gap: 18 }}&gt;&#10;                &lt;Box style={{ flex: 1, background: '#1E4FA8', borderRadius: 6, padding: '14px 18px', flexDirection: 'column', gap: 5, justifyContent: 'center' }}&gt;&#10;                    &lt;Text style={{ fontSize: 19, fontWeight: 'bold', color: '#FFFFFF' }}&gt;矢量图的阈值还没标定&lt;/Text&gt;&#10;                    &lt;Text style={{ fontSize: 15, color: '#CFE0F5', lineHeight: 1.4 }}&gt;手头两篇论文里一个矢量簇都没聚出来，所以规则定得偏保守，遇到 matplotlib 直出的论文要重新测。&lt;/Text&gt;&#10;                &lt;/Box&gt;&#10;                &lt;Box style={{ flex: 1, background: '#1E4FA8', borderRadius: 6, padding: '14px 18px', flexDirection: 'column', gap: 5, justifyContent: 'center' }}&gt;&#10;                    &lt;Text style={{ fontSize: 19, fontWeight: 'bold', color: '#FFFFFF' }}&gt;论文那四项评测指标一条都没跑&lt;/Text&gt;&#10;                    &lt;Text style={{ fontSize: 15, color: '#CFE0F5', lineHeight: 1.4 }}&gt;要复现论文里报的数字，必须换回它的原始模型组合。也就是说，做出来的东西还没有跟原论文对齐着量过。&lt;/Text&gt;&#10;                &lt;/Box&gt;&#10;            &lt;/Box&gt;&#10;&#10;            &lt;Box style={{ width: 567, height: 306, flexDirection: 'column', gap: 18 }}&gt;&#10;                &lt;Box style={{ flex: 1, background: '#1E4FA8', borderRadius: 6, padding: '14px 18px', flexDirection: 'column', gap: 5, justifyContent: 'center' }}&gt;&#10;                    &lt;Text style={{ fontSize: 19, fontWeight: 'bold', color: '#FFFFFF' }}&gt;本机 GPU 上的产物还没进缓存&lt;/Text&gt;&#10;                    &lt;Text style={{ fontSize: 15, color: '#CFE0F5', lineHeight: 1.4 }}&gt;现在只有联网的两步能靠指纹跳过。语音、光标、数字人这三段每次都要重跑，占了一条片子 24 分钟里的绝大部分。&lt;/Text&gt;&#10;                &lt;/Box&gt;&#10;                &lt;Box style={{ flex: 1, background: '#1E4FA8', borderRadius: 6, padding: '14px 18px', flexDirection: 'column', gap: 5, justifyContent: 'center' }}&gt;&#10;                    &lt;Text style={{ fontSize: 19, fontWeight: 'bold', color: '#FFFFFF' }}&gt;多人使用还缺三件事&lt;/Text&gt;&#10;                    &lt;Text style={{ fontSize: 15, color: '#CFE0F5', lineHeight: 1.4 }}&gt;按人统计用量、排队可见、内网访问。现在只监听本机回环地址，凭据倒是已经按任务隔离了。&lt;/Text&gt;&#10;                &lt;/Box&gt;&#10;            &lt;/Box&gt;&#10;        &lt;/Box&gt;&#10;&#10;        &lt;Box style={{ flex: 1, background: '#15529E', borderLeft: '4px solid #3D7BD9', borderRadius: 4, padding: '14px 20px', flexDirection: 'column', justifyContent: 'center', gap: 5, marginTop: 4 }}&gt;&#10;            &lt;Text style={{ fontSize: 15, fontWeight: 'bold', color: '#8FB6E8', letterSpacing: 1 }}&gt;最后一条不是待办，是结论&lt;/Text&gt;&#10;            &lt;Text style={{ fontSize: 18, color: '#FFFFFF', lineHeight: 1.45 }}&gt;模型全部换过之后，论文报告的那些数字不能当成这套系统的成绩——它们来自另一套模型组合。我做的是一次在单卡约束下的重新选型。&lt;/Text&gt;&#10;        &lt;/Box&gt;&#10;    &lt;/Box&gt;&#10;&#10;    &lt;Box style={{ height: 76, padding: '0 64px', flexDirection: 'row', alignItems: 'center', justifyContent: 'space-between' }}&gt;&#10;        &lt;Text style={{ fontSize: 15, color: '#8FB6E8' }}&gt;致谢 / 联系方式 / 仓库地址：＿＿＿＿＿＿＿＿＿＿&lt;/Text&gt;&#10;        &lt;Text style={{ fontSize: 16, fontWeight: 'bold', color: '#FFFFFF' }}&gt;15 / 15&lt;/Text&gt;&#10;    &lt;/Box&gt;&#10;&lt;/Slide&gt;&#10;"/>
+        <p:cNvPr id="166" name=""/>
         <p:cNvGrpSpPr/>
         <p:nvPr/>
       </p:nvGrpSpPr>
@@ -8192,7 +8270,10 @@
         </p:spPr>
         <p:txBody>
           <a:bodyPr/>
-          <a:p/>
+          <a:p>
+            <a:pPr/>
+            <a:endParaRPr/>
+          </a:p>
         </p:txBody>
       </p:sp>
       <p:sp>
@@ -8216,7 +8297,10 @@
         </p:spPr>
         <p:txBody>
           <a:bodyPr/>
-          <a:p/>
+          <a:p>
+            <a:pPr/>
+            <a:endParaRPr/>
+          </a:p>
         </p:txBody>
       </p:sp>
       <p:sp>
@@ -8352,7 +8436,10 @@
         </p:spPr>
         <p:txBody>
           <a:bodyPr/>
-          <a:p/>
+          <a:p>
+            <a:pPr/>
+            <a:endParaRPr/>
+          </a:p>
         </p:txBody>
       </p:sp>
       <p:sp>
@@ -8470,7 +8557,10 @@
         </p:spPr>
         <p:txBody>
           <a:bodyPr/>
-          <a:p/>
+          <a:p>
+            <a:pPr/>
+            <a:endParaRPr/>
+          </a:p>
         </p:txBody>
       </p:sp>
       <p:sp>
@@ -8568,7 +8658,10 @@
         </p:spPr>
         <p:txBody>
           <a:bodyPr/>
-          <a:p/>
+          <a:p>
+            <a:pPr/>
+            <a:endParaRPr/>
+          </a:p>
         </p:txBody>
       </p:sp>
       <p:sp>
@@ -8706,7 +8799,10 @@
         </p:spPr>
         <p:txBody>
           <a:bodyPr/>
-          <a:p/>
+          <a:p>
+            <a:pPr/>
+            <a:endParaRPr/>
+          </a:p>
         </p:txBody>
       </p:sp>
       <p:sp>
@@ -8804,7 +8900,10 @@
         </p:spPr>
         <p:txBody>
           <a:bodyPr/>
-          <a:p/>
+          <a:p>
+            <a:pPr/>
+            <a:endParaRPr/>
+          </a:p>
         </p:txBody>
       </p:sp>
       <p:sp>
@@ -8851,7 +8950,10 @@
         </p:spPr>
         <p:txBody>
           <a:bodyPr/>
-          <a:p/>
+          <a:p>
+            <a:pPr/>
+            <a:endParaRPr/>
+          </a:p>
         </p:txBody>
       </p:sp>
       <p:sp>
@@ -9044,7 +9146,7 @@
   <p:cSld>
     <p:spTree>
       <p:nvGrpSpPr>
-        <p:cNvPr id="189" name="" descr="&lt;Slide style={{ width: 1280, height: 720, display: 'flex', flexDirection: 'column', background: '#FFFFFF', fontFamily: &quot;'Microsoft YaHei', 'PingFang SC', 'Noto Sans CJK SC', sans-serif&quot;, padding: 0 }}&gt;&#10;    &lt;Box style={{ height: 72, background: '#0E3F8C', flexDirection: 'row', alignItems: 'center', justifyContent: 'space-between', padding: '0 40px' }}&gt;&#10;        &lt;Text style={{ fontSize: 20, fontWeight: 'bold', color: '#FFFFFF' }}&gt;Paper2Video 项目汇报&lt;/Text&gt;&#10;        &lt;Text style={{ fontSize: 16, color: '#8FB6E8', letterSpacing: 2 }}&gt;背景&lt;/Text&gt;&#10;    &lt;/Box&gt;&#10;&#10;    &lt;Box style={{ flex: 1, flexDirection: 'column', padding: '24px 40px', gap: 16 }}&gt;&#10;        &lt;Box style={{ height: 44, flexDirection: 'row', alignItems: 'center', gap: 16 }}&gt;&#10;            &lt;Box style={{ width: 5, height: 34, background: '#1E4FA8', borderRadius: 2 }} /&gt;&#10;            &lt;Text style={{ fontSize: 36, fontWeight: 'bold', color: '#0E3F8C' }}&gt;这件事难在哪&lt;/Text&gt;&#10;            &lt;Text style={{ fontSize: 17, color: '#8B97A8', marginLeft: 6 }}&gt;学术会议要求作者交 2 到 10 分钟的演讲视频，手工做一条要几个小时&lt;/Text&gt;&#10;        &lt;/Box&gt;&#10;&#10;        &lt;Box style={{ height: 412, flexDirection: 'row', gap: 28 }}&gt;&#10;            &lt;Box style={{ width: 688, height: 412, flexDirection: 'column', gap: 10 }}&gt;&#10;                &lt;Box style={{ width: 688, height: 378, background: '#F7F9FC', border: '1px solid #D6DCE5', borderRadius: 6, padding: 8 }}&gt;&#10;                    &lt;Image src='assets/paper_method.png' style={{ width: 672, height: 362, objectFit: 'contain' }} /&gt;&#10;                &lt;/Box&gt;&#10;                &lt;Text style={{ fontSize: 14, color: '#8B97A8' }}&gt;论文 PaperTalker 的方法总览：四个 builder 串成一条链（截自论文原图）&lt;/Text&gt;&#10;            &lt;/Box&gt;&#10;&#10;            &lt;Box style={{ width: 444, height: 412, flexDirection: 'column', gap: 10 }}&gt;&#10;                &lt;Text style={{ fontSize: 24, fontWeight: 'bold', color: '#1E4FA8' }}&gt;四件事必须同时对&lt;/Text&gt;&#10;&#10;                &lt;Box style={{ flexDirection: 'row', gap: 12, alignItems: 'flex-start' }}&gt;&#10;                    &lt;Box style={{ width: 28, height: 28, background: '#1E4FA8', borderRadius: 4, alignItems: 'center', justifyContent: 'center' }}&gt;&#10;                        &lt;Text style={{ fontSize: 15, fontWeight: 'bold', color: '#FFFFFF' }}&gt;1&lt;/Text&gt;&#10;                    &lt;/Box&gt;&#10;                    &lt;Box style={{ flex: 1, flexDirection: 'column', gap: 2 }}&gt;&#10;                        &lt;Text style={{ fontSize: 19, fontWeight: 'bold', color: '#1A2230' }}&gt;幻灯片&lt;/Text&gt;&#10;                        &lt;Text style={{ fontSize: 15, color: '#4A5568', lineHeight: 1.4 }}&gt;要有能看的图表和标题，不是把正文搬上去&lt;/Text&gt;&#10;                    &lt;/Box&gt;&#10;                &lt;/Box&gt;&#10;&#10;                &lt;Box style={{ flexDirection: 'row', gap: 12, alignItems: 'flex-start' }}&gt;&#10;                    &lt;Box style={{ width: 28, height: 28, background: '#1E4FA8', borderRadius: 4, alignItems: 'center', justifyContent: 'center' }}&gt;&#10;                        &lt;Text style={{ fontSize: 15, fontWeight: 'bold', color: '#FFFFFF' }}&gt;2&lt;/Text&gt;&#10;                    &lt;/Box&gt;&#10;                    &lt;Box style={{ flex: 1, flexDirection: 'column', gap: 2 }}&gt;&#10;                        &lt;Text style={{ fontSize: 19, fontWeight: 'bold', color: '#1A2230' }}&gt;字幕&lt;/Text&gt;&#10;                        &lt;Text style={{ fontSize: 15, color: '#4A5568', lineHeight: 1.4 }}&gt;每一句都要跟当前这张幻灯片对得上&lt;/Text&gt;&#10;                    &lt;/Box&gt;&#10;                &lt;/Box&gt;&#10;&#10;                &lt;Box style={{ flexDirection: 'row', gap: 12, alignItems: 'flex-start' }}&gt;&#10;                    &lt;Box style={{ width: 28, height: 28, background: '#1E4FA8', borderRadius: 4, alignItems: 'center', justifyContent: 'center' }}&gt;&#10;                        &lt;Text style={{ fontSize: 15, fontWeight: 'bold', color: '#FFFFFF' }}&gt;3&lt;/Text&gt;&#10;                    &lt;/Box&gt;&#10;                    &lt;Box style={{ flex: 1, flexDirection: 'column', gap: 2 }}&gt;&#10;                        &lt;Text style={{ fontSize: 19, fontWeight: 'bold', color: '#1A2230' }}&gt;光标&lt;/Text&gt;&#10;                        &lt;Text style={{ fontSize: 15, color: '#4A5568', lineHeight: 1.4 }}&gt;跟着正在讲的那句话，指向画面里正确的位置&lt;/Text&gt;&#10;                    &lt;/Box&gt;&#10;                &lt;/Box&gt;&#10;&#10;                &lt;Box style={{ flexDirection: 'row', gap: 12, alignItems: 'flex-start' }}&gt;&#10;                    &lt;Box style={{ width: 28, height: 28, background: '#1E4FA8', borderRadius: 4, alignItems: 'center', justifyContent: 'center' }}&gt;&#10;                        &lt;Text style={{ fontSize: 15, fontWeight: 'bold', color: '#FFFFFF' }}&gt;4&lt;/Text&gt;&#10;                    &lt;/Box&gt;&#10;                    &lt;Box style={{ flex: 1, flexDirection: 'column', gap: 2 }}&gt;&#10;                        &lt;Text style={{ fontSize: 19, fontWeight: 'bold', color: '#1A2230' }}&gt;数字人&lt;/Text&gt;&#10;                        &lt;Text style={{ fontSize: 15, color: '#4A5568', lineHeight: 1.4 }}&gt;用作者的头像和声音讲，口型还得对&lt;/Text&gt;&#10;                    &lt;/Box&gt;&#10;                &lt;/Box&gt;&#10;&#10;                &lt;Box style={{ flex: 1, background: '#E8EFF8', borderLeft: '4px solid #1E4FA8', borderRadius: 4, padding: '12px 16px', justifyContent: 'center' }}&gt;&#10;                    &lt;Text style={{ fontSize: 17, color: '#1A2230', lineHeight: 1.5 }}&gt;难的不是&quot;生成一段视频&quot;，是让这四个通道互相对齐。论文的实测里，端到端模型只能出 8 秒，文字还是糊的。&lt;/Text&gt;&#10;                &lt;/Box&gt;&#10;            &lt;/Box&gt;&#10;        &lt;/Box&gt;&#10;&#10;        &lt;Box style={{ height: 64, background: '#0E3F8C', borderRadius: 6, padding: '0 22px', flexDirection: 'row', alignItems: 'center', gap: 16 }}&gt;&#10;            &lt;Text style={{ fontSize: 15, fontWeight: 'bold', color: '#8FB6E8' }}&gt;论文给的答案&lt;/Text&gt;&#10;            &lt;Text style={{ fontSize: 19, color: '#FFFFFF' }}&gt;PaperTalker 四个 builder + 101 篇论文的评测基准，四项指标衡量&quot;讲得怎么样&quot;&lt;/Text&gt;&#10;        &lt;/Box&gt;&#10;    &lt;/Box&gt;&#10;&#10;    &lt;Box style={{ height: 48, padding: '0 40px', flexDirection: 'row', alignItems: 'center', justifyContent: 'space-between' }}&gt;&#10;        &lt;Text style={{ fontSize: 14, color: '#8B97A8' }}&gt;论文：arXiv 2510.05096v2（Show Lab, NUS）&lt;/Text&gt;&#10;        &lt;Text style={{ fontSize: 16, fontWeight: 'bold', color: '#0E3F8C' }}&gt;02 / 15&lt;/Text&gt;&#10;    &lt;/Box&gt;&#10;&lt;/Slide&gt;&#10;"/>
+        <p:cNvPr id="189" name=""/>
         <p:cNvGrpSpPr/>
         <p:nvPr/>
       </p:nvGrpSpPr>
@@ -9077,7 +9179,10 @@
         </p:spPr>
         <p:txBody>
           <a:bodyPr/>
-          <a:p/>
+          <a:p>
+            <a:pPr/>
+            <a:endParaRPr/>
+          </a:p>
         </p:txBody>
       </p:sp>
       <p:sp>
@@ -9101,7 +9206,10 @@
         </p:spPr>
         <p:txBody>
           <a:bodyPr/>
-          <a:p/>
+          <a:p>
+            <a:pPr/>
+            <a:endParaRPr/>
+          </a:p>
         </p:txBody>
       </p:sp>
       <p:sp>
@@ -9207,7 +9315,10 @@
         </p:spPr>
         <p:txBody>
           <a:bodyPr/>
-          <a:p/>
+          <a:p>
+            <a:pPr/>
+            <a:endParaRPr/>
+          </a:p>
         </p:txBody>
       </p:sp>
       <p:sp>
@@ -9348,7 +9459,10 @@
         </p:spPr>
         <p:txBody>
           <a:bodyPr/>
-          <a:p/>
+          <a:p>
+            <a:pPr/>
+            <a:endParaRPr/>
+          </a:p>
         </p:txBody>
       </p:sp>
       <p:pic>
@@ -9510,7 +9624,10 @@
         </p:spPr>
         <p:txBody>
           <a:bodyPr/>
-          <a:p/>
+          <a:p>
+            <a:pPr/>
+            <a:endParaRPr/>
+          </a:p>
         </p:txBody>
       </p:sp>
       <p:sp>
@@ -9641,7 +9758,10 @@
         </p:spPr>
         <p:txBody>
           <a:bodyPr/>
-          <a:p/>
+          <a:p>
+            <a:pPr/>
+            <a:endParaRPr/>
+          </a:p>
         </p:txBody>
       </p:sp>
       <p:sp>
@@ -9772,7 +9892,10 @@
         </p:spPr>
         <p:txBody>
           <a:bodyPr/>
-          <a:p/>
+          <a:p>
+            <a:pPr/>
+            <a:endParaRPr/>
+          </a:p>
         </p:txBody>
       </p:sp>
       <p:sp>
@@ -9903,7 +10026,10 @@
         </p:spPr>
         <p:txBody>
           <a:bodyPr/>
-          <a:p/>
+          <a:p>
+            <a:pPr/>
+            <a:endParaRPr/>
+          </a:p>
         </p:txBody>
       </p:sp>
       <p:sp>
@@ -10034,7 +10160,10 @@
         </p:spPr>
         <p:txBody>
           <a:bodyPr/>
-          <a:p/>
+          <a:p>
+            <a:pPr/>
+            <a:endParaRPr/>
+          </a:p>
         </p:txBody>
       </p:sp>
       <p:sp>
@@ -10081,7 +10210,10 @@
         </p:spPr>
         <p:txBody>
           <a:bodyPr/>
-          <a:p/>
+          <a:p>
+            <a:pPr/>
+            <a:endParaRPr/>
+          </a:p>
         </p:txBody>
       </p:sp>
       <p:sp>
@@ -10204,7 +10336,10 @@
         </p:spPr>
         <p:txBody>
           <a:bodyPr/>
-          <a:p/>
+          <a:p>
+            <a:pPr/>
+            <a:endParaRPr/>
+          </a:p>
         </p:txBody>
       </p:sp>
       <p:sp>
@@ -10457,7 +10592,7 @@
   <p:cSld>
     <p:spTree>
       <p:nvGrpSpPr>
-        <p:cNvPr id="225" name="" descr="&lt;Slide style={{ width: 1280, height: 720, display: 'flex', flexDirection: 'column', background: '#FFFFFF', fontFamily: &quot;'Microsoft YaHei', 'PingFang SC', 'Noto Sans CJK SC', sans-serif&quot;, padding: 0 }}&gt;&#10;    &lt;Box style={{ height: 72, background: '#0E3F8C', flexDirection: 'row', alignItems: 'center', justifyContent: 'space-between', padding: '0 40px' }}&gt;&#10;        &lt;Text style={{ fontSize: 20, fontWeight: 'bold', color: '#FFFFFF' }}&gt;Paper2Video 项目汇报&lt;/Text&gt;&#10;        &lt;Text style={{ fontSize: 16, color: '#8FB6E8', letterSpacing: 2 }}&gt;目标&lt;/Text&gt;&#10;    &lt;/Box&gt;&#10;&#10;    &lt;Box style={{ flex: 1, flexDirection: 'column', padding: '24px 40px', gap: 16 }}&gt;&#10;        &lt;Box style={{ height: 44, flexDirection: 'row', alignItems: 'center', gap: 16 }}&gt;&#10;            &lt;Box style={{ width: 5, height: 34, background: '#1E4FA8', borderRadius: 2 }} /&gt;&#10;            &lt;Text style={{ fontSize: 36, fontWeight: 'bold', color: '#0E3F8C' }}&gt;三个约束，把方案钉死了&lt;/Text&gt;&#10;            &lt;Text style={{ fontSize: 17, color: '#8B97A8', marginLeft: 6 }}&gt;论文跑在 8 张 A6000 上，我只有一张消费级卡&lt;/Text&gt;&#10;        &lt;/Box&gt;&#10;&#10;        &lt;Box style={{ height: 492, flexDirection: 'row', gap: 24 }}&gt;&#10;            &lt;Box style={{ width: 400, height: 492, background: '#0E3F8C', borderRadius: 8, padding: '34px 30px', flexDirection: 'column', justifyContent: 'space-between' }}&gt;&#10;                &lt;Box style={{ flexDirection: 'column', gap: 10 }}&gt;&#10;                    &lt;Text style={{ fontSize: 16, color: '#8FB6E8', letterSpacing: 3 }}&gt;我手上的卡&lt;/Text&gt;&#10;                    &lt;Text style={{ fontSize: 104, fontWeight: 'bold', color: '#FFFFFF', lineHeight: 1.05 }}&gt;16GB&lt;/Text&gt;&#10;                    &lt;Text style={{ fontSize: 18, color: '#B5D4F4', lineHeight: 1.5 }}&gt;RTX 5070 Ti 单卡&lt;br /&gt;Blackwell 架构（sm_120）&lt;/Text&gt;&#10;                &lt;/Box&gt;&#10;&#10;                &lt;Box style={{ flexDirection: 'column', gap: 8 }}&gt;&#10;                    &lt;Box style={{ height: 1, background: '#3D7BD9' }} /&gt;&#10;                    &lt;Text style={{ fontSize: 16, color: '#8FB6E8', lineHeight: 1.6 }}&gt;论文的配置：8 × A6000 48GB&lt;br /&gt;单卡 48GB，合计 384GB&lt;/Text&gt;&#10;                    &lt;Text style={{ fontSize: 19, fontWeight: 'bold', color: '#FFC107' }}&gt;差了 24 倍&lt;/Text&gt;&#10;                &lt;/Box&gt;&#10;            &lt;/Box&gt;&#10;&#10;            &lt;Box style={{ width: 776, height: 492, flexDirection: 'column', gap: 12 }}&gt;&#10;                &lt;Text style={{ fontSize: 18, color: '#1A2230', lineHeight: 1.5 }}&gt;我给自己定了三个目标，后面每一个技术选择都是它们逼出来的：先能在单卡上跑通，模型全部换成国产开源，许可证必须干净到能交付。&lt;/Text&gt;&#10;&#10;                &lt;Box style={{ height: 188, background: '#F7F9FC', border: '1px solid #D6DCE5', borderRadius: 6, padding: '8px 12px' }}&gt;&#10;                    &lt;Chart&#10;                        style={{ width: '100%', height: 172 }}&#10;                        chartType='barChart'&#10;                        barDirection='bar'&#10;                        title='显存规模对比（GB）'&#10;                        titleColor='#0E3F8C'&#10;                        showLegend={false}&#10;                        showDataLabels={true}&#10;                        axisColor='#8B97A8'&#10;                        dataLabelColor='#1A2230'&#10;                        colors={['#1E4FA8']}&#10;                        data={[&#10;                            ['配置', '显存'],&#10;                            ['论文 8×A6000 合计', 384],&#10;                            ['本机单卡', 16],&#10;                        ]}&#10;                    /&gt;&#10;                &lt;/Box&gt;&#10;&#10;                &lt;Box style={{ height: 60, flexDirection: 'row', gap: 12, alignItems: 'flex-start' }}&gt;&#10;                    &lt;Box style={{ width: 5, height: 40, background: '#D9534F', borderRadius: 2, marginTop: 4 }} /&gt;&#10;                    &lt;Box style={{ flex: 1, flexDirection: 'column', gap: 2 }}&gt;&#10;                        &lt;Text style={{ fontSize: 18, fontWeight: 'bold', color: '#1A2230' }}&gt;显存 16GB，而且架构很新&lt;/Text&gt;&#10;                        &lt;Text style={{ fontSize: 15, color: '#4A5568', lineHeight: 1.4 }}&gt;预编译好的算子经常用不了，现场编译又容易失败——几个模型就是死在这一步&lt;/Text&gt;&#10;                    &lt;/Box&gt;&#10;                &lt;/Box&gt;&#10;&#10;                &lt;Box style={{ height: 60, flexDirection: 'row', gap: 12, alignItems: 'flex-start' }}&gt;&#10;                    &lt;Box style={{ width: 5, height: 40, background: '#1E4FA8', borderRadius: 2, marginTop: 4 }} /&gt;&#10;                    &lt;Box style={{ flex: 1, flexDirection: 'column', gap: 2 }}&gt;&#10;                        &lt;Text style={{ fontSize: 18, fontWeight: 'bold', color: '#1A2230' }}&gt;许可证要能交付&lt;/Text&gt;&#10;                        &lt;Text style={{ fontSize: 15, color: '#4A5568', lineHeight: 1.4 }}&gt;论文原方案里的语音模型是 CC-BY-NC，非商用——这类一律不碰&lt;/Text&gt;&#10;                    &lt;/Box&gt;&#10;                &lt;/Box&gt;&#10;&#10;                &lt;Box style={{ height: 60, flexDirection: 'row', gap: 12, alignItems: 'flex-start' }}&gt;&#10;                    &lt;Box style={{ width: 5, height: 40, background: '#1E4FA8', borderRadius: 2, marginTop: 4 }} /&gt;&#10;                    &lt;Box style={{ flex: 1, flexDirection: 'column', gap: 2 }}&gt;&#10;                        &lt;Text style={{ fontSize: 18, fontWeight: 'bold', color: '#1A2230' }}&gt;&quot;能跑&quot;排在&quot;最好&quot;前面&lt;/Text&gt;&#10;                        &lt;Text style={{ fontSize: 15, color: '#4A5568', lineHeight: 1.4 }}&gt;效果榜上排第一但装不上的模型，对我等于零&lt;/Text&gt;&#10;                    &lt;/Box&gt;&#10;                &lt;/Box&gt;&#10;            &lt;/Box&gt;&#10;        &lt;/Box&gt;&#10;    &lt;/Box&gt;&#10;&#10;    &lt;Box style={{ height: 48, padding: '0 40px', flexDirection: 'row', alignItems: 'center', justifyContent: 'space-between' }}&gt;&#10;        &lt;Text style={{ fontSize: 14, color: '#8B97A8' }}&gt;A6000 显存与数量取自论文实验设置；本机为 RTX 5070 Ti 16GB&lt;/Text&gt;&#10;        &lt;Text style={{ fontSize: 16, fontWeight: 'bold', color: '#0E3F8C' }}&gt;03 / 15&lt;/Text&gt;&#10;    &lt;/Box&gt;&#10;&lt;/Slide&gt;&#10;"/>
+        <p:cNvPr id="225" name=""/>
         <p:cNvGrpSpPr/>
         <p:nvPr/>
       </p:nvGrpSpPr>
@@ -10490,7 +10625,10 @@
         </p:spPr>
         <p:txBody>
           <a:bodyPr/>
-          <a:p/>
+          <a:p>
+            <a:pPr/>
+            <a:endParaRPr/>
+          </a:p>
         </p:txBody>
       </p:sp>
       <p:sp>
@@ -10514,7 +10652,10 @@
         </p:spPr>
         <p:txBody>
           <a:bodyPr/>
-          <a:p/>
+          <a:p>
+            <a:pPr/>
+            <a:endParaRPr/>
+          </a:p>
         </p:txBody>
       </p:sp>
       <p:sp>
@@ -10620,7 +10761,10 @@
         </p:spPr>
         <p:txBody>
           <a:bodyPr/>
-          <a:p/>
+          <a:p>
+            <a:pPr/>
+            <a:endParaRPr/>
+          </a:p>
         </p:txBody>
       </p:sp>
       <p:sp>
@@ -10756,7 +10900,10 @@
         </p:spPr>
         <p:txBody>
           <a:bodyPr/>
-          <a:p/>
+          <a:p>
+            <a:pPr/>
+            <a:endParaRPr/>
+          </a:p>
         </p:txBody>
       </p:sp>
       <p:sp>
@@ -10943,7 +11090,10 @@
         </p:spPr>
         <p:txBody>
           <a:bodyPr/>
-          <a:p/>
+          <a:p>
+            <a:pPr/>
+            <a:endParaRPr/>
+          </a:p>
         </p:txBody>
       </p:sp>
       <p:sp>
@@ -11159,7 +11309,10 @@
         </p:spPr>
         <p:txBody>
           <a:bodyPr/>
-          <a:p/>
+          <a:p>
+            <a:pPr/>
+            <a:endParaRPr/>
+          </a:p>
         </p:txBody>
       </p:sp>
       <p:graphicFrame>
@@ -11201,7 +11354,10 @@
         </p:spPr>
         <p:txBody>
           <a:bodyPr/>
-          <a:p/>
+          <a:p>
+            <a:pPr/>
+            <a:endParaRPr/>
+          </a:p>
         </p:txBody>
       </p:sp>
       <p:sp>
@@ -11317,7 +11473,10 @@
         </p:spPr>
         <p:txBody>
           <a:bodyPr/>
-          <a:p/>
+          <a:p>
+            <a:pPr/>
+            <a:endParaRPr/>
+          </a:p>
         </p:txBody>
       </p:sp>
       <p:sp>
@@ -11433,7 +11592,10 @@
         </p:spPr>
         <p:txBody>
           <a:bodyPr/>
-          <a:p/>
+          <a:p>
+            <a:pPr/>
+            <a:endParaRPr/>
+          </a:p>
         </p:txBody>
       </p:sp>
       <p:sp>
@@ -11676,7 +11838,7 @@
   <p:cSld>
     <p:spTree>
       <p:nvGrpSpPr>
-        <p:cNvPr id="254" name="" descr="&lt;Slide style={{ width: 1280, height: 720, display: 'flex', flexDirection: 'column', background: '#FFFFFF', fontFamily: &quot;'Microsoft YaHei', 'PingFang SC', 'Noto Sans CJK SC', sans-serif&quot;, padding: 0 }}&gt;&#10;    &lt;Box style={{ height: 72, background: '#0E3F8C', flexDirection: 'row', alignItems: 'center', justifyContent: 'space-between', padding: '0 40px' }}&gt;&#10;        &lt;Text style={{ fontSize: 20, fontWeight: 'bold', color: '#FFFFFF' }}&gt;Paper2Video 项目汇报&lt;/Text&gt;&#10;        &lt;Text style={{ fontSize: 16, color: '#8FB6E8', letterSpacing: 2 }}&gt;方案&lt;/Text&gt;&#10;    &lt;/Box&gt;&#10;&#10;    &lt;Box style={{ flex: 1, flexDirection: 'column', padding: '24px 40px', gap: 16 }}&gt;&#10;        &lt;Box style={{ height: 44, flexDirection: 'row', alignItems: 'center', gap: 16 }}&gt;&#10;            &lt;Box style={{ width: 5, height: 34, background: '#1E4FA8', borderRadius: 2 }} /&gt;&#10;            &lt;Text style={{ fontSize: 36, fontWeight: 'bold', color: '#0E3F8C' }}&gt;六个位置，全部换掉&lt;/Text&gt;&#10;            &lt;Text style={{ fontSize: 17, color: '#8B97A8', marginLeft: 6 }}&gt;不是为了效果更好，是为了先能在这张卡上跑起来&lt;/Text&gt;&#10;        &lt;/Box&gt;&#10;&#10;        &lt;Box style={{ height: 412 }}&gt;&#10;            &lt;Table&#10;                style={{ width: '100%', height: '100%' }}&#10;                defaultTextStyle={{ fontSize: 17, textAlign: 'left', color: '#1A2230' }}&#10;                defaultCellStyle={{&#10;                    border: {&#10;                        left: { width: 1, color: '#D6DCE5' },&#10;                        right: { width: 1, color: '#D6DCE5' },&#10;                        top: { width: 1, color: '#D6DCE5' },&#10;                        bottom: { width: 1, color: '#D6DCE5' },&#10;                    },&#10;                }}&#10;                cells={[&#10;                    [&#10;                        { text: '位置', textStyle: { bold: true, color: '#FFFFFF', fontSize: 18 }, cellStyle: { background: { color: '#0E3F8C' } } },&#10;                        { text: '论文用的模型', textStyle: { bold: true, color: '#FFFFFF', fontSize: 18 }, cellStyle: { background: { color: '#0E3F8C' } } },&#10;                        { text: '换成', textStyle: { bold: true, color: '#FFFFFF', fontSize: 18 }, cellStyle: { background: { color: '#0E3F8C' } } },&#10;                        { text: '为什么必须换', textStyle: { bold: true, color: '#FFFFFF', fontSize: 18 }, cellStyle: { background: { color: '#0E3F8C' } } },&#10;                    ],&#10;                    [&#10;                        '语音合成',&#10;                        'F5-TTS 0.34B',&#10;                        { text: 'Qwen3-TTS-1.7B', textStyle: { bold: true, color: '#1E4FA8' } },&#10;                        '原模型是 CC-BY-NC 非商用，不能交付',&#10;                    ],&#10;                    [&#10;                        { text: '光标定位', cellStyle: { background: { color: '#F7F9FC' } } },&#10;                        { text: 'UI-TARS-1.5-7B', cellStyle: { background: { color: '#F7F9FC' } } },&#10;                        { text: 'GUI-Owl-1.5-4B', textStyle: { bold: true, color: '#1E4FA8' }, cellStyle: { background: { color: '#F7F9FC' } } },&#10;                        { text: '7B 的 bf16 要 15GB 以上，开箱就爆显存', cellStyle: { background: { color: '#F7F9FC' } } },&#10;                    ],&#10;                    [&#10;                        '转写对齐',&#10;                        'WhisperX large-v3',&#10;                        { text: 'Qwen3-ASR + ForcedAligner', textStyle: { bold: true, color: '#1E4FA8' } },&#10;                        '依赖链更短，和光标那边共用一套模型家族',&#10;                    ],&#10;                    [&#10;                        { text: '数字人', cellStyle: { background: { color: '#F7F9FC' } } },&#10;                        { text: 'Hallo2', cellStyle: { background: { color: '#F7F9FC' } } },&#10;                        { text: 'MuseTalk', textStyle: { bold: true, color: '#1E4FA8' }, cellStyle: { background: { color: '#F7F9FC' } } },&#10;                        { text: '原模型锁 CUDA 11.8，不含这台卡的编译目标', cellStyle: { background: { color: '#F7F9FC' } } },&#10;                    ],&#10;                    [&#10;                        '语言 + 视觉',&#10;                        'GPT-4.1',&#10;                        { text: 'DeepSeek-V4.1-Flash', textStyle: { bold: true, color: '#1E4FA8' } },&#10;                        '支持原生图像输入，代码几乎不用改',&#10;                    ],&#10;                    [&#10;                        { text: '视频理解', cellStyle: { background: { color: '#F7F9FC' } } },&#10;                        { text: 'Gemini-2.5-Flash', cellStyle: { background: { color: '#F7F9FC' } } },&#10;                        { text: 'Qwen3.5-Omni-Plus', textStyle: { bold: true, color: '#1E4FA8' }, cellStyle: { background: { color: '#F7F9FC' } } },&#10;                        { text: 'DeepSeek 不支持视频，这一段只能换一家', cellStyle: { background: { color: '#F7F9FC' } } },&#10;                    ],&#10;                ]}&#10;            /&gt;&#10;        &lt;/Box&gt;&#10;&#10;        &lt;Box style={{ height: 64, background: '#E8EFF8', borderLeft: '4px solid #1E4FA8', borderRadius: 4, padding: '0 20px', flexDirection: 'row', alignItems: 'center', gap: 18 }}&gt;&#10;            &lt;Text style={{ fontSize: 15, fontWeight: 'bold', color: '#0E3F8C', letterSpacing: 1 }}&gt;换完的结果&lt;/Text&gt;&#10;            &lt;Text style={{ fontSize: 18, color: '#1A2230', lineHeight: 1.4 }}&gt;本地侧从 5 个模型、3 套环境收敛成 2 个模型家族，显存峰值从 24GB 以上压到约 10GB。API 侧几乎没动代码：上游本来就带兜底分支，传个参数就切过去了。&lt;/Text&gt;&#10;        &lt;/Box&gt;&#10;    &lt;/Box&gt;&#10;&#10;    &lt;Box style={{ height: 48, padding: '0 40px', flexDirection: 'row', alignItems: 'center', justifyContent: 'space-between' }}&gt;&#10;        &lt;Text style={{ fontSize: 14, color: '#8B97A8' }}&gt;许可证：Qwen3 系列 Apache-2.0 · GUI-Owl 与 MuseTalk 为 MIT&lt;/Text&gt;&#10;        &lt;Text style={{ fontSize: 16, fontWeight: 'bold', color: '#0E3F8C' }}&gt;04 / 15&lt;/Text&gt;&#10;    &lt;/Box&gt;&#10;&lt;/Slide&gt;&#10;"/>
+        <p:cNvPr id="254" name=""/>
         <p:cNvGrpSpPr/>
         <p:nvPr/>
       </p:nvGrpSpPr>
@@ -11709,7 +11871,10 @@
         </p:spPr>
         <p:txBody>
           <a:bodyPr/>
-          <a:p/>
+          <a:p>
+            <a:pPr/>
+            <a:endParaRPr/>
+          </a:p>
         </p:txBody>
       </p:sp>
       <p:sp>
@@ -11733,7 +11898,10 @@
         </p:spPr>
         <p:txBody>
           <a:bodyPr/>
-          <a:p/>
+          <a:p>
+            <a:pPr/>
+            <a:endParaRPr/>
+          </a:p>
         </p:txBody>
       </p:sp>
       <p:sp>
@@ -11839,7 +12007,10 @@
         </p:spPr>
         <p:txBody>
           <a:bodyPr/>
-          <a:p/>
+          <a:p>
+            <a:pPr/>
+            <a:endParaRPr/>
+          </a:p>
         </p:txBody>
       </p:sp>
       <p:sp>
@@ -13171,7 +13342,10 @@
         </p:spPr>
         <p:txBody>
           <a:bodyPr/>
-          <a:p/>
+          <a:p>
+            <a:pPr/>
+            <a:endParaRPr/>
+          </a:p>
         </p:txBody>
       </p:sp>
       <p:sp>
@@ -13218,7 +13392,10 @@
         </p:spPr>
         <p:txBody>
           <a:bodyPr/>
-          <a:p/>
+          <a:p>
+            <a:pPr/>
+            <a:endParaRPr/>
+          </a:p>
         </p:txBody>
       </p:sp>
       <p:sp>
@@ -13563,7 +13740,7 @@
   <p:cSld>
     <p:spTree>
       <p:nvGrpSpPr>
-        <p:cNvPr id="269" name="" descr="&lt;Slide style={{ width: 1280, height: 720, display: 'flex', flexDirection: 'column', background: '#FFFFFF', fontFamily: &quot;'Microsoft YaHei', 'PingFang SC', 'Noto Sans CJK SC', sans-serif&quot;, padding: 0 }}&gt;&#10;    &lt;Box style={{ height: 72, background: '#0E3F8C', flexDirection: 'row', alignItems: 'center', justifyContent: 'space-between', padding: '0 40px' }}&gt;&#10;        &lt;Text style={{ fontSize: 20, fontWeight: 'bold', color: '#FFFFFF' }}&gt;Paper2Video 项目汇报&lt;/Text&gt;&#10;        &lt;Text style={{ fontSize: 16, color: '#8FB6E8', letterSpacing: 2 }}&gt;架构&lt;/Text&gt;&#10;    &lt;/Box&gt;&#10;&#10;    &lt;Box style={{ flex: 1, flexDirection: 'column', padding: '24px 40px', gap: 16 }}&gt;&#10;        &lt;Box style={{ height: 44, flexDirection: 'row', alignItems: 'center', gap: 16 }}&gt;&#10;            &lt;Box style={{ width: 5, height: 34, background: '#1E4FA8', borderRadius: 2 }} /&gt;&#10;            &lt;Text style={{ fontSize: 36, fontWeight: 'bold', color: '#0E3F8C' }}&gt;改在哪一层&lt;/Text&gt;&#10;            &lt;Text style={{ fontSize: 17, color: '#8B97A8', marginLeft: 6 }}&gt;分三层看：哪一层是我们加的，哪一层原样不动&lt;/Text&gt;&#10;        &lt;/Box&gt;&#10;&#10;        &lt;Box style={{ height: 300, background: '#F7F9FC', border: '1px solid #D6DCE5', borderRadius: 6, padding: 10 }}&gt;&#10;            &lt;svg width={1180} height={280} viewBox='0 0 1180 280'&gt;&#10;                &lt;text x='0' y='13' fontSize='15' fill='#8B97A8'&gt;① 我们自己加的输入层 —— 论文里没有这一层，因为论文的输入就是它自带的 LaTeX 工程&lt;/text&gt;&#10;                &lt;rect x='0' y='22' width='265' height='52' rx='6' fill='#E8EFF8' stroke='#1E4FA8' strokeWidth='1' /&gt;&#10;                &lt;text x='132' y='45' fontSize='17' fill='#0E3F8C' textAnchor='middle' dominantBaseline='central'&gt;PDF / Word / .zip&lt;/text&gt;&#10;                &lt;text x='132' y='62' fontSize='14' fill='#4A5568' textAnchor='middle' dominantBaseline='central'&gt;使用者手上真实有的东西&lt;/text&gt;&#10;&#10;                &lt;rect x='305' y='22' width='265' height='52' rx='6' fill='#E8EFF8' stroke='#1E4FA8' strokeWidth='1' /&gt;&#10;                &lt;text x='437' y='45' fontSize='17' fill='#0E3F8C' textAnchor='middle' dominantBaseline='central'&gt;paper_ingest&lt;/text&gt;&#10;                &lt;text x='437' y='62' fontSize='14' fill='#4A5568' textAnchor='middle' dominantBaseline='central'&gt;提正文 · 本地跑，不花钱&lt;/text&gt;&#10;&#10;                &lt;rect x='610' y='22' width='265' height='52' rx='6' fill='#E8EFF8' stroke='#1E4FA8' strokeWidth='1' /&gt;&#10;                &lt;text x='742' y='45' fontSize='17' fill='#0E3F8C' textAnchor='middle' dominantBaseline='central'&gt;paper_struct&lt;/text&gt;&#10;                &lt;text x='742' y='62' fontSize='14' fill='#4A5568' textAnchor='middle' dominantBaseline='central'&gt;结构化成 main.tex · 唯一花钱&lt;/text&gt;&#10;&#10;                &lt;rect x='915' y='22' width='265' height='52' rx='6' fill='#E8EFF8' stroke='#1E4FA8' strokeWidth='1' /&gt;&#10;                &lt;text x='1047' y='45' fontSize='17' fill='#0E3F8C' textAnchor='middle' dominantBaseline='central'&gt;LaTeX 工程&lt;/text&gt;&#10;                &lt;text x='1047' y='62' fontSize='14' fill='#4A5568' textAnchor='middle' dominantBaseline='central'&gt;main.tex + figures/&lt;/text&gt;&#10;&#10;                &lt;text x='0' y='104' fontSize='15' fill='#8B97A8'&gt;② 上游 PaperTalker 的四个 builder —— 分工和算法我们一个字没改&lt;/text&gt;&#10;                &lt;rect x='0' y='112' width='280' height='48' rx='6' fill='#FFFFFF' stroke='#D6DCE5' strokeWidth='1' /&gt;&#10;                &lt;text x='140' y='136' fontSize='17' fill='#4A5568' textAnchor='middle' dominantBaseline='central'&gt;Slide builder&lt;/text&gt;&#10;&#10;                &lt;rect x='300' y='112' width='280' height='48' rx='6' fill='#FFFFFF' stroke='#D6DCE5' strokeWidth='1' /&gt;&#10;                &lt;text x='440' y='136' fontSize='17' fill='#4A5568' textAnchor='middle' dominantBaseline='central'&gt;Subtitle builder&lt;/text&gt;&#10;&#10;                &lt;rect x='600' y='112' width='280' height='48' rx='6' fill='#FFFFFF' stroke='#D6DCE5' strokeWidth='1' /&gt;&#10;                &lt;text x='740' y='136' fontSize='17' fill='#4A5568' textAnchor='middle' dominantBaseline='central'&gt;Cursor builder&lt;/text&gt;&#10;&#10;                &lt;rect x='900' y='112' width='280' height='48' rx='6' fill='#FFFFFF' stroke='#D6DCE5' strokeWidth='1' /&gt;&#10;                &lt;text x='1040' y='136' fontSize='17' fill='#4A5568' textAnchor='middle' dominantBaseline='central'&gt;Talker builder&lt;/text&gt;&#10;&#10;                &lt;line x1='140' y1='160' x2='140' y2='178' stroke='#8B97A8' strokeWidth='1' strokeDasharray='3 3' /&gt;&#10;                &lt;line x1='440' y1='160' x2='440' y2='178' stroke='#8B97A8' strokeWidth='1' strokeDasharray='3 3' /&gt;&#10;                &lt;line x1='740' y1='160' x2='740' y2='178' stroke='#8B97A8' strokeWidth='1' strokeDasharray='3 3' /&gt;&#10;                &lt;line x1='1040' y1='160' x2='1040' y2='178' stroke='#8B97A8' strokeWidth='1' strokeDasharray='3 3' /&gt;&#10;&#10;                &lt;text x='0' y='194' fontSize='15' fill='#8B97A8'&gt;③ 我们贴在各模块上的改动 —— 按模块对号入座&lt;/text&gt;&#10;                &lt;rect x='0' y='202' width='280' height='56' rx='6' fill='#E8EFF8' stroke='#1E4FA8' strokeWidth='1' /&gt;&#10;                &lt;text x='140' y='222' fontSize='16' fill='#0E3F8C' textAnchor='middle' dominantBaseline='central'&gt;修 5 处编码&lt;/text&gt;&#10;                &lt;text x='140' y='242' fontSize='14' fill='#4A5568' textAnchor='middle' dominantBaseline='central'&gt;接线论文配图清单&lt;/text&gt;&#10;&#10;                &lt;rect x='300' y='202' width='280' height='56' rx='6' fill='#E8EFF8' stroke='#1E4FA8' strokeWidth='1' /&gt;&#10;                &lt;text x='440' y='222' fontSize='16' fill='#0E3F8C' textAnchor='middle' dominantBaseline='central'&gt;退化护栏&lt;/text&gt;&#10;                &lt;text x='440' y='242' fontSize='14' fill='#4A5568' textAnchor='middle' dominantBaseline='central'&gt;重试 + 判空 + 判完整性&lt;/text&gt;&#10;&#10;                &lt;rect x='600' y='202' width='280' height='56' rx='6' fill='#E8EFF8' stroke='#1E4FA8' strokeWidth='1' /&gt;&#10;                &lt;text x='740' y='222' fontSize='16' fill='#0E3F8C' textAnchor='middle' dominantBaseline='central'&gt;换 GUI-Owl&lt;/text&gt;&#10;                &lt;text x='740' y='242' fontSize='14' fill='#4A5568' textAnchor='middle' dominantBaseline='central'&gt;逐条上报进度&lt;/text&gt;&#10;&#10;                &lt;rect x='900' y='202' width='280' height='56' rx='6' fill='#E8EFF8' stroke='#1E4FA8' strokeWidth='1' /&gt;&#10;                &lt;text x='1040' y='222' fontSize='16' fill='#0E3F8C' textAnchor='middle' dominantBaseline='central'&gt;换 MuseTalk&lt;/text&gt;&#10;                &lt;text x='1040' y='242' fontSize='14' fill='#4A5568' textAnchor='middle' dominantBaseline='central'&gt;偶数尺寸补丁 + 音频指纹&lt;/text&gt;&#10;            &lt;/svg&gt;&#10;        &lt;/Box&gt;&#10;&#10;        &lt;Box style={{ height: 176, flexDirection: 'row', gap: 20 }}&gt;&#10;            &lt;Box style={{ width: 590, height: 176, background: '#F7F9FC', border: '1px solid #D6DCE5', borderRadius: 6, padding: '16px 20px', flexDirection: 'column', justifyContent: 'space-between' }}&gt;&#10;                &lt;Box style={{ flexDirection: 'column', gap: 6 }}&gt;&#10;                    &lt;Text style={{ fontSize: 22, fontWeight: 'bold', color: '#0E3F8C' }}&gt;改动的规模&lt;/Text&gt;&#10;                    &lt;Text style={{ fontSize: 16, color: '#4A5568', lineHeight: 1.5 }}&gt;对上游目录一共 20 个文件：12 个是修改，8 个是新增。改动集中在输入层、平台适配和静默失败修复，算法主干原样保留——动了主干，就不好说自己在复现论文了。&lt;/Text&gt;&#10;                &lt;/Box&gt;&#10;                &lt;Text style={{ fontSize: 20, fontWeight: 'bold', color: '#1E4FA8' }}&gt;+3552 行 / -260 行&lt;/Text&gt;&#10;            &lt;/Box&gt;&#10;&#10;            &lt;Box style={{ width: 590, height: 176, background: '#F7F9FC', border: '1px solid #D6DCE5', borderRadius: 6, padding: '16px 20px', flexDirection: 'column', justifyContent: 'space-between' }}&gt;&#10;                &lt;Box style={{ flexDirection: 'column', gap: 6 }}&gt;&#10;                    &lt;Text style={{ fontSize: 22, fontWeight: 'bold', color: '#0E3F8C' }}&gt;刻意没动的部分&lt;/Text&gt;&#10;                    &lt;Text style={{ fontSize: 16, color: '#4A5568', lineHeight: 1.5 }}&gt;四个 builder 的分工、树搜索的算法、按页独立生成的思路都保持原样。对上游的补丁随本仓库版本库一起走，搬到服务器上不用手工重打一遍。&lt;/Text&gt;&#10;                &lt;/Box&gt;&#10;                &lt;Text style={{ fontSize: 20, fontWeight: 'bold', color: '#1E4FA8' }}&gt;算法主干 0 处改动&lt;/Text&gt;&#10;            &lt;/Box&gt;&#10;        &lt;/Box&gt;&#10;    &lt;/Box&gt;&#10;&#10;    &lt;Box style={{ height: 48, padding: '0 40px', flexDirection: 'row', alignItems: 'center', justifyContent: 'space-between' }}&gt;&#10;        &lt;Text style={{ fontSize: 14, color: '#8B97A8' }}&gt;改动量统计口径：首次引入上游代码的提交到当前版本&lt;/Text&gt;&#10;        &lt;Text style={{ fontSize: 16, fontWeight: 'bold', color: '#0E3F8C' }}&gt;05 / 15&lt;/Text&gt;&#10;    &lt;/Box&gt;&#10;&lt;/Slide&gt;&#10;"/>
+        <p:cNvPr id="269" name=""/>
         <p:cNvGrpSpPr/>
         <p:nvPr/>
       </p:nvGrpSpPr>
@@ -13596,7 +13773,10 @@
         </p:spPr>
         <p:txBody>
           <a:bodyPr/>
-          <a:p/>
+          <a:p>
+            <a:pPr/>
+            <a:endParaRPr/>
+          </a:p>
         </p:txBody>
       </p:sp>
       <p:sp>
@@ -13620,7 +13800,10 @@
         </p:spPr>
         <p:txBody>
           <a:bodyPr/>
-          <a:p/>
+          <a:p>
+            <a:pPr/>
+            <a:endParaRPr/>
+          </a:p>
         </p:txBody>
       </p:sp>
       <p:sp>
@@ -13726,7 +13909,10 @@
         </p:spPr>
         <p:txBody>
           <a:bodyPr/>
-          <a:p/>
+          <a:p>
+            <a:pPr/>
+            <a:endParaRPr/>
+          </a:p>
         </p:txBody>
       </p:sp>
       <p:sp>
@@ -13827,7 +14013,10 @@
         </p:spPr>
         <p:txBody>
           <a:bodyPr/>
-          <a:p/>
+          <a:p>
+            <a:pPr/>
+            <a:endParaRPr/>
+          </a:p>
         </p:txBody>
       </p:sp>
       <p:pic>
@@ -13889,7 +14078,10 @@
         </p:spPr>
         <p:txBody>
           <a:bodyPr/>
-          <a:p/>
+          <a:p>
+            <a:pPr/>
+            <a:endParaRPr/>
+          </a:p>
         </p:txBody>
       </p:sp>
       <p:sp>
@@ -14117,7 +14309,10 @@
         </p:spPr>
         <p:txBody>
           <a:bodyPr/>
-          <a:p/>
+          <a:p>
+            <a:pPr/>
+            <a:endParaRPr/>
+          </a:p>
         </p:txBody>
       </p:sp>
       <p:sp>
@@ -14347,7 +14542,7 @@
   <p:cSld>
     <p:spTree>
       <p:nvGrpSpPr>
-        <p:cNvPr id="289" name="" descr="&lt;Slide style={{ width: 1280, height: 720, display: 'flex', flexDirection: 'column', background: '#FFFFFF', fontFamily: &quot;'Microsoft YaHei', 'PingFang SC', 'Noto Sans CJK SC', sans-serif&quot;, padding: 0 }}&gt;&#10;    &lt;Box style={{ height: 72, background: '#0E3F8C', flexDirection: 'row', alignItems: 'center', justifyContent: 'space-between', padding: '0 40px' }}&gt;&#10;        &lt;Text style={{ fontSize: 20, fontWeight: 'bold', color: '#FFFFFF' }}&gt;Paper2Video 项目汇报&lt;/Text&gt;&#10;        &lt;Text style={{ fontSize: 16, color: '#8FB6E8', letterSpacing: 2 }}&gt;核心功能 1 / 3&lt;/Text&gt;&#10;    &lt;/Box&gt;&#10;&#10;    &lt;Box style={{ flex: 1, flexDirection: 'column', padding: '24px 40px', gap: 16 }}&gt;&#10;        &lt;Box style={{ height: 44, flexDirection: 'row', alignItems: 'center', gap: 16 }}&gt;&#10;            &lt;Box style={{ width: 5, height: 34, background: '#1E4FA8', borderRadius: 2 }} /&gt;&#10;            &lt;Text style={{ fontSize: 36, fontWeight: 'bold', color: '#0E3F8C' }}&gt;让输入没有门槛&lt;/Text&gt;&#10;            &lt;Text style={{ fontSize: 17, color: '#8B97A8', marginLeft: 6 }}&gt;论文要求交一个 LaTeX 工程，可使用者手上只有 PDF 或 Word&lt;/Text&gt;&#10;        &lt;/Box&gt;&#10;&#10;        &lt;Box style={{ height: 492, flexDirection: 'row', gap: 24 }}&gt;&#10;            &lt;Box style={{ width: 772, height: 492, flexDirection: 'column', gap: 16 }}&gt;&#10;                &lt;Box style={{ height: 104, background: '#F7F9FC', border: '1px solid #D6DCE5', borderRadius: 6, padding: 10 }}&gt;&#10;                    &lt;svg width={752} height={84} viewBox='0 0 752 84'&gt;&#10;                        &lt;rect x='0' y='12' width='220' height='60' rx='6' fill='#E8EFF8' stroke='#1E4FA8' strokeWidth='1' /&gt;&#10;                        &lt;text x='110' y='34' fontSize='17' fill='#0E3F8C' textAnchor='middle' dominantBaseline='central'&gt;PDF / Word / .zip&lt;/text&gt;&#10;                        &lt;text x='110' y='53' fontSize='14' fill='#4A5568' textAnchor='middle' dominantBaseline='central'&gt;使用者真实拿得出来的东西&lt;/text&gt;&#10;&#10;                        &lt;line x1='226' y1='42' x2='262' y2='42' stroke='#1E4FA8' strokeWidth='1.5' /&gt;&#10;                        &lt;path d='M262 42 L256 38 L256 46 Z' fill='#1E4FA8' /&gt;&#10;&#10;                        &lt;rect x='270' y='12' width='210' height='60' rx='6' fill='#E8EFF8' stroke='#1E4FA8' strokeWidth='1' /&gt;&#10;                        &lt;text x='375' y='34' fontSize='17' fill='#0E3F8C' textAnchor='middle' dominantBaseline='central'&gt;提取正文&lt;/text&gt;&#10;                        &lt;text x='375' y='53' fontSize='14' fill='#4A5568' textAnchor='middle' dominantBaseline='central'&gt;本地跑，不花 API 钱&lt;/text&gt;&#10;&#10;                        &lt;line x1='486' y1='42' x2='522' y2='42' stroke='#1E4FA8' strokeWidth='1.5' /&gt;&#10;                        &lt;path d='M522 42 L516 38 L516 46 Z' fill='#1E4FA8' /&gt;&#10;&#10;                        &lt;rect x='530' y='12' width='222' height='60' rx='6' fill='#E8EFF8' stroke='#1E4FA8' strokeWidth='1' /&gt;&#10;                        &lt;text x='641' y='34' fontSize='17' fill='#0E3F8C' textAnchor='middle' dominantBaseline='central'&gt;结构化成 main.tex&lt;/text&gt;&#10;                        &lt;text x='641' y='53' fontSize='14' fill='#4A5568' textAnchor='middle' dominantBaseline='central'&gt;一次 API 调用，唯一花钱的一步&lt;/text&gt;&#10;                    &lt;/svg&gt;&#10;                &lt;/Box&gt;&#10;&#10;                &lt;Box style={{ height: 240, flexDirection: 'column', gap: 12 }}&gt;&#10;                    &lt;Box style={{ flex: 1, flexDirection: 'row', gap: 12, alignItems: 'flex-start' }}&gt;&#10;                        &lt;Box style={{ width: 5, height: 36, background: '#1E4FA8', borderRadius: 2, marginTop: 3 }} /&gt;&#10;                        &lt;Box style={{ flex: 1, flexDirection: 'column', gap: 2 }}&gt;&#10;                            &lt;Text style={{ fontSize: 19, fontWeight: 'bold', color: '#1A2230' }}&gt;不用 Office / WPS 的自动化接口&lt;/Text&gt;&#10;                            &lt;Text style={{ fontSize: 15, color: '#4A5568', lineHeight: 1.4 }}&gt;它会连上你正开着的 WPS，然后挂死两分半钟——一律改成纯 Python 处理&lt;/Text&gt;&#10;                        &lt;/Box&gt;&#10;                    &lt;/Box&gt;&#10;&#10;                    &lt;Box style={{ flex: 1, flexDirection: 'row', gap: 12, alignItems: 'flex-start' }}&gt;&#10;                        &lt;Box style={{ width: 5, height: 36, background: '#1E4FA8', borderRadius: 2, marginTop: 3 }} /&gt;&#10;                        &lt;Box style={{ flex: 1, flexDirection: 'column', gap: 2 }}&gt;&#10;                            &lt;Text style={{ fontSize: 19, fontWeight: 'bold', color: '#1A2230' }}&gt;PDF 提取必须做&quot;行合并&quot;&lt;/Text&gt;&#10;                            &lt;Text style={{ fontSize: 15, color: '#4A5568', lineHeight: 1.4 }}&gt;PDF 按列宽把一句话硬切成半句，不合并的话交给模型的是碎片&lt;/Text&gt;&#10;                        &lt;/Box&gt;&#10;                    &lt;/Box&gt;&#10;&#10;                    &lt;Box style={{ flex: 1, flexDirection: 'row', gap: 12, alignItems: 'flex-start' }}&gt;&#10;                        &lt;Box style={{ width: 5, height: 36, background: '#D9534F', borderRadius: 2, marginTop: 3 }} /&gt;&#10;                        &lt;Box style={{ flex: 1, flexDirection: 'column', gap: 2 }}&gt;&#10;                            &lt;Text style={{ fontSize: 19, fontWeight: 'bold', color: '#1A2230' }}&gt;三种格式里，PDF 反而最好用&lt;/Text&gt;&#10;                            &lt;Text style={{ fontSize: 15, color: '#4A5568', lineHeight: 1.4 }}&gt;真实 Word 根本不用标题样式，docx 在结构上没有便宜可占&lt;/Text&gt;&#10;                        &lt;/Box&gt;&#10;                    &lt;/Box&gt;&#10;                &lt;/Box&gt;&#10;&#10;                &lt;Box style={{ height: 116, background: '#E8EFF8', borderLeft: '4px solid #1E4FA8', borderRadius: 4, padding: '14px 18px', flexDirection: 'column', justifyContent: 'center', gap: 6 }}&gt;&#10;                    &lt;Text style={{ fontSize: 15, fontWeight: 'bold', color: '#0E3F8C', letterSpacing: 1 }}&gt;判断&lt;/Text&gt;&#10;                    &lt;Text style={{ fontSize: 18, color: '#1A2230', lineHeight: 1.5 }}&gt;第三个结论和直觉相反。我一开始也以为结构更规整的 docx 会更好，实测之后才发现 PDF 的噪声最少，所以现在默认优先用 PDF。&lt;/Text&gt;&#10;                &lt;/Box&gt;&#10;            &lt;/Box&gt;&#10;&#10;            &lt;Box style={{ width: 404, height: 492, flexDirection: 'column', gap: 10 }}&gt;&#10;                &lt;Box style={{ width: 404, height: 264, background: '#F7F9FC', border: '1px solid #D6DCE5', borderRadius: 6, padding: 8 }}&gt;&#10;                    &lt;Image src='assets/slide_real_02.png' style={{ width: 388, height: 248, objectFit: 'contain' }} /&gt;&#10;                &lt;/Box&gt;&#10;                &lt;Text style={{ fontSize: 13, color: '#8B97A8', lineHeight: 1.4 }}&gt;本机流水线真实渲染出来的幻灯片（第 2 页），位于转换层下游&lt;/Text&gt;&#10;&#10;                &lt;Box style={{ flex: 1, background: '#F7F9FC', border: '1px solid #D6DCE5', borderRadius: 6, padding: '12px 16px', flexDirection: 'column', justifyContent: 'center', gap: 4 }}&gt;&#10;                    &lt;Text style={{ fontSize: 58, fontWeight: 'bold', color: '#1E4FA8', lineHeight: 1.05 }}&gt;1.3%&lt;/Text&gt;&#10;                    &lt;Text style={{ fontSize: 14, color: '#4A5568', lineHeight: 1.45 }}&gt;结构化撞到输出上限时被截掉的正文比例（本机实测）。截断点选在最后一个环境配平的位置，补上结束标记后照样编译通过。&lt;/Text&gt;&#10;                &lt;/Box&gt;&#10;            &lt;/Box&gt;&#10;        &lt;/Box&gt;&#10;    &lt;/Box&gt;&#10;&#10;    &lt;Box style={{ height: 48, padding: '0 40px', flexDirection: 'row', alignItems: 'center', justifyContent: 'space-between' }}&gt;&#10;        &lt;Text style={{ fontSize: 14, color: '#8B97A8' }}&gt;结构化输出上限 65536 token，超限先续写最多 3 轮，仍不全才截断&lt;/Text&gt;&#10;        &lt;Text style={{ fontSize: 16, fontWeight: 'bold', color: '#0E3F8C' }}&gt;06 / 15&lt;/Text&gt;&#10;    &lt;/Box&gt;&#10;&lt;/Slide&gt;&#10;"/>
+        <p:cNvPr id="289" name=""/>
         <p:cNvGrpSpPr/>
         <p:nvPr/>
       </p:nvGrpSpPr>
@@ -14380,7 +14575,10 @@
         </p:spPr>
         <p:txBody>
           <a:bodyPr/>
-          <a:p/>
+          <a:p>
+            <a:pPr/>
+            <a:endParaRPr/>
+          </a:p>
         </p:txBody>
       </p:sp>
       <p:sp>
@@ -14404,7 +14602,10 @@
         </p:spPr>
         <p:txBody>
           <a:bodyPr/>
-          <a:p/>
+          <a:p>
+            <a:pPr/>
+            <a:endParaRPr/>
+          </a:p>
         </p:txBody>
       </p:sp>
       <p:sp>
@@ -14520,7 +14721,10 @@
         </p:spPr>
         <p:txBody>
           <a:bodyPr/>
-          <a:p/>
+          <a:p>
+            <a:pPr/>
+            <a:endParaRPr/>
+          </a:p>
         </p:txBody>
       </p:sp>
       <p:sp>
@@ -14671,7 +14875,10 @@
         </p:spPr>
         <p:txBody>
           <a:bodyPr/>
-          <a:p/>
+          <a:p>
+            <a:pPr/>
+            <a:endParaRPr/>
+          </a:p>
         </p:txBody>
       </p:sp>
       <p:pic>
@@ -14728,7 +14935,10 @@
         </p:spPr>
         <p:txBody>
           <a:bodyPr/>
-          <a:p/>
+          <a:p>
+            <a:pPr/>
+            <a:endParaRPr/>
+          </a:p>
         </p:txBody>
       </p:sp>
       <p:sp>
@@ -14884,7 +15094,10 @@
         </p:spPr>
         <p:txBody>
           <a:bodyPr/>
-          <a:p/>
+          <a:p>
+            <a:pPr/>
+            <a:endParaRPr/>
+          </a:p>
         </p:txBody>
       </p:sp>
       <p:sp>
@@ -15030,7 +15243,10 @@
         </p:spPr>
         <p:txBody>
           <a:bodyPr/>
-          <a:p/>
+          <a:p>
+            <a:pPr/>
+            <a:endParaRPr/>
+          </a:p>
         </p:txBody>
       </p:sp>
       <p:sp>
@@ -15186,7 +15402,10 @@
         </p:spPr>
         <p:txBody>
           <a:bodyPr/>
-          <a:p/>
+          <a:p>
+            <a:pPr/>
+            <a:endParaRPr/>
+          </a:p>
         </p:txBody>
       </p:sp>
       <p:sp>
@@ -15233,7 +15452,10 @@
         </p:spPr>
         <p:txBody>
           <a:bodyPr/>
-          <a:p/>
+          <a:p>
+            <a:pPr/>
+            <a:endParaRPr/>
+          </a:p>
         </p:txBody>
       </p:sp>
       <p:sp>
@@ -15396,7 +15618,10 @@
         </p:spPr>
         <p:txBody>
           <a:bodyPr/>
-          <a:p/>
+          <a:p>
+            <a:pPr/>
+            <a:endParaRPr/>
+          </a:p>
         </p:txBody>
       </p:sp>
       <p:pic>
@@ -15508,7 +15733,10 @@
         </p:spPr>
         <p:txBody>
           <a:bodyPr/>
-          <a:p/>
+          <a:p>
+            <a:pPr/>
+            <a:endParaRPr/>
+          </a:p>
         </p:txBody>
       </p:sp>
       <p:sp>
@@ -15703,7 +15931,7 @@
   <p:cSld>
     <p:spTree>
       <p:nvGrpSpPr>
-        <p:cNvPr id="320" name="" descr="&lt;Slide style={{ width: 1280, height: 720, display: 'flex', flexDirection: 'column', background: '#FFFFFF', fontFamily: &quot;'Microsoft YaHei', 'PingFang SC', 'Noto Sans CJK SC', sans-serif&quot;, padding: 0 }}&gt;&#10;    &lt;Box style={{ height: 72, background: '#0E3F8C', flexDirection: 'row', alignItems: 'center', justifyContent: 'space-between', padding: '0 40px' }}&gt;&#10;        &lt;Text style={{ fontSize: 20, fontWeight: 'bold', color: '#FFFFFF' }}&gt;Paper2Video 项目汇报&lt;/Text&gt;&#10;        &lt;Text style={{ fontSize: 16, color: '#8FB6E8', letterSpacing: 2 }}&gt;核心功能 2 / 3&lt;/Text&gt;&#10;    &lt;/Box&gt;&#10;&#10;    &lt;Box style={{ flex: 1, flexDirection: 'column', padding: '24px 40px', gap: 16 }}&gt;&#10;        &lt;Box style={{ height: 44, flexDirection: 'row', alignItems: 'center', gap: 16 }}&gt;&#10;            &lt;Box style={{ width: 5, height: 34, background: '#1E4FA8', borderRadius: 2 }} /&gt;&#10;            &lt;Text style={{ fontSize: 36, fontWeight: 'bold', color: '#0E3F8C' }}&gt;幻灯片里终于有图了&lt;/Text&gt;&#10;            &lt;Text style={{ fontSize: 17, color: '#8B97A8', marginLeft: 6 }}&gt;这张图是从论文 PDF 里提出来的，不是画的&lt;/Text&gt;&#10;        &lt;/Box&gt;&#10;&#10;        &lt;Box style={{ height: 492, flexDirection: 'row', gap: 24 }}&gt;&#10;            &lt;Box style={{ width: 640, height: 492, flexDirection: 'column', gap: 12 }}&gt;&#10;                &lt;Box style={{ width: 640, height: 428, background: '#F7F9FC', border: '1px solid #D6DCE5', borderRadius: 6, padding: 8 }}&gt;&#10;                    &lt;Image src='assets/fig_extract_01.jpg' style={{ width: 624, height: 412, objectFit: 'contain' }} /&gt;&#10;                &lt;/Box&gt;&#10;                &lt;Text style={{ fontSize: 14, color: '#8B97A8', lineHeight: 1.4 }}&gt;提取结果：论文第 6 页的插图，1984 × 1542，输出为 JPEG 落入工程 figures/ 目录&lt;/Text&gt;&#10;            &lt;/Box&gt;&#10;&#10;            &lt;Box style={{ width: 536, height: 492, flexDirection: 'column', gap: 12 }}&gt;&#10;                &lt;Text style={{ fontSize: 18, fontWeight: 'bold', color: '#1A2230', lineHeight: 1.45 }}&gt;模型一张图都没引用，这不是它偷懒——它按提示词做对了&lt;/Text&gt;&#10;&#10;                &lt;Box style={{ height: 88, flexDirection: 'row', gap: 12, alignItems: 'flex-start' }}&gt;&#10;                    &lt;Box style={{ width: 72, height: 26, background: '#E8EFF8', borderRadius: 13, alignItems: 'center', justifyContent: 'center' }}&gt;&#10;                        &lt;Text style={{ fontSize: 14, fontWeight: 'bold', color: '#0E3F8C' }}&gt;问题&lt;/Text&gt;&#10;                    &lt;/Box&gt;&#10;                    &lt;Text style={{ flex: 1, fontSize: 16, color: '#4A5568', lineHeight: 1.45 }}&gt;我们从前端只提取正文，所以工程里就只有一个 main.tex，没有任何图片文件可以被引用。&lt;/Text&gt;&#10;                &lt;/Box&gt;&#10;&#10;                &lt;Box style={{ height: 88, flexDirection: 'row', gap: 12, alignItems: 'flex-start' }}&gt;&#10;                    &lt;Box style={{ width: 72, height: 26, background: '#E8EFF8', borderRadius: 13, alignItems: 'center', justifyContent: 'center' }}&gt;&#10;                        &lt;Text style={{ fontSize: 14, fontWeight: 'bold', color: '#0E3F8C' }}&gt;线索&lt;/Text&gt;&#10;                    &lt;/Box&gt;&#10;                    &lt;Text style={{ flex: 1, fontSize: 16, color: '#4A5568', lineHeight: 1.45 }}&gt;中文提示词里写着一句话：若没有可用图片，不要写任何图片引用。所以零张图是正确输出。&lt;/Text&gt;&#10;                &lt;/Box&gt;&#10;&#10;                &lt;Box style={{ height: 88, flexDirection: 'row', gap: 12, alignItems: 'flex-start' }}&gt;&#10;                    &lt;Box style={{ width: 72, height: 26, background: '#F7C1C1', borderRadius: 13, alignItems: 'center', justifyContent: 'center' }}&gt;&#10;                        &lt;Text style={{ fontSize: 14, fontWeight: 'bold', color: '#791F1F' }}&gt;后果&lt;/Text&gt;&#10;                    &lt;/Box&gt;&#10;                    &lt;Text style={{ flex: 1, fontSize: 16, color: '#4A5568', lineHeight: 1.45 }}&gt;树搜索只会缩放图片宽度。没有图，论文这条核心机制就没有任何可做的事——下一页细说。&lt;/Text&gt;&#10;                &lt;/Box&gt;&#10;&#10;                &lt;Box style={{ flex: 1, background: '#E8EFF8', borderLeft: '4px solid #1E4FA8', borderRadius: 4, padding: '14px 18px', flexDirection: 'row', alignItems: 'center', gap: 28 }}&gt;&#10;                    &lt;Box style={{ flexDirection: 'column', gap: 2 }}&gt;&#10;                        &lt;Text style={{ fontSize: 48, fontWeight: 'bold', color: '#0E3F8C', lineHeight: 1.05 }}&gt;2 张&lt;/Text&gt;&#10;                        &lt;Text style={{ fontSize: 14, color: '#4A5568', lineHeight: 1.4 }}&gt;从论文里提出来的插图&lt;/Text&gt;&#10;                    &lt;/Box&gt;&#10;                    &lt;Box style={{ width: 1, height: 62, background: '#B5D4F4' }} /&gt;&#10;                    &lt;Box style={{ flexDirection: 'column', gap: 2 }}&gt;&#10;                        &lt;Text style={{ fontSize: 48, fontWeight: 'bold', color: '#0E3F8C', lineHeight: 1.05 }}&gt;2 次&lt;/Text&gt;&#10;                        &lt;Text style={{ fontSize: 14, color: '#4A5568', lineHeight: 1.4 }}&gt;幻灯片源码里对应的图片引用&lt;/Text&gt;&#10;                    &lt;/Box&gt;&#10;                &lt;/Box&gt;&#10;            &lt;/Box&gt;&#10;        &lt;/Box&gt;&#10;    &lt;/Box&gt;&#10;&#10;    &lt;Box style={{ height: 48, padding: '0 40px', flexDirection: 'row', alignItems: 'center', justifyContent: 'space-between' }}&gt;&#10;        &lt;Text style={{ fontSize: 14, color: '#8B97A8' }}&gt;日志原文：[figures] 提取 2 张（pdf）→ 已把清单附给幻灯片生成&lt;/Text&gt;&#10;        &lt;Text style={{ fontSize: 16, fontWeight: 'bold', color: '#0E3F8C' }}&gt;07 / 15&lt;/Text&gt;&#10;    &lt;/Box&gt;&#10;&lt;/Slide&gt;&#10;"/>
+        <p:cNvPr id="320" name=""/>
         <p:cNvGrpSpPr/>
         <p:nvPr/>
       </p:nvGrpSpPr>
@@ -15736,7 +15964,10 @@
         </p:spPr>
         <p:txBody>
           <a:bodyPr/>
-          <a:p/>
+          <a:p>
+            <a:pPr/>
+            <a:endParaRPr/>
+          </a:p>
         </p:txBody>
       </p:sp>
       <p:sp>
@@ -15760,7 +15991,10 @@
         </p:spPr>
         <p:txBody>
           <a:bodyPr/>
-          <a:p/>
+          <a:p>
+            <a:pPr/>
+            <a:endParaRPr/>
+          </a:p>
         </p:txBody>
       </p:sp>
       <p:sp>
@@ -15876,7 +16110,10 @@
         </p:spPr>
         <p:txBody>
           <a:bodyPr/>
-          <a:p/>
+          <a:p>
+            <a:pPr/>
+            <a:endParaRPr/>
+          </a:p>
         </p:txBody>
       </p:sp>
       <p:sp>
@@ -15997,7 +16234,10 @@
         </p:spPr>
         <p:txBody>
           <a:bodyPr/>
-          <a:p/>
+          <a:p>
+            <a:pPr/>
+            <a:endParaRPr/>
+          </a:p>
         </p:txBody>
       </p:sp>
       <p:pic>
@@ -16199,7 +16439,10 @@
         </p:spPr>
         <p:txBody>
           <a:bodyPr/>
-          <a:p/>
+          <a:p>
+            <a:pPr/>
+            <a:endParaRPr/>
+          </a:p>
         </p:txBody>
       </p:sp>
       <p:sp>
@@ -16317,7 +16560,10 @@
         </p:spPr>
         <p:txBody>
           <a:bodyPr/>
-          <a:p/>
+          <a:p>
+            <a:pPr/>
+            <a:endParaRPr/>
+          </a:p>
         </p:txBody>
       </p:sp>
       <p:sp>
@@ -16415,7 +16661,10 @@
         </p:spPr>
         <p:txBody>
           <a:bodyPr/>
-          <a:p/>
+          <a:p>
+            <a:pPr/>
+            <a:endParaRPr/>
+          </a:p>
         </p:txBody>
       </p:sp>
       <p:sp>
@@ -16513,7 +16762,10 @@
         </p:spPr>
         <p:txBody>
           <a:bodyPr/>
-          <a:p/>
+          <a:p>
+            <a:pPr/>
+            <a:endParaRPr/>
+          </a:p>
         </p:txBody>
       </p:sp>
       <p:sp>
@@ -16560,7 +16812,10 @@
         </p:spPr>
         <p:txBody>
           <a:bodyPr/>
-          <a:p/>
+          <a:p>
+            <a:pPr/>
+            <a:endParaRPr/>
+          </a:p>
         </p:txBody>
       </p:sp>
       <p:sp>
@@ -16664,7 +16919,10 @@
         </p:spPr>
         <p:txBody>
           <a:bodyPr/>
-          <a:p/>
+          <a:p>
+            <a:pPr/>
+            <a:endParaRPr/>
+          </a:p>
         </p:txBody>
       </p:sp>
       <p:sp>
@@ -16907,7 +17165,7 @@
   <p:cSld>
     <p:spTree>
       <p:nvGrpSpPr>
-        <p:cNvPr id="350" name="" descr="&lt;Slide style={{ width: 1280, height: 720, display: 'flex', flexDirection: 'column', background: '#FFFFFF', fontFamily: &quot;'Microsoft YaHei', 'PingFang SC', 'Noto Sans CJK SC', sans-serif&quot;, padding: 0 }}&gt;&#10;    &lt;Box style={{ height: 72, background: '#0E3F8C', flexDirection: 'row', alignItems: 'center', justifyContent: 'space-between', padding: '0 40px' }}&gt;&#10;        &lt;Text style={{ fontSize: 20, fontWeight: 'bold', color: '#FFFFFF' }}&gt;Paper2Video 项目汇报&lt;/Text&gt;&#10;        &lt;Text style={{ fontSize: 16, color: '#8FB6E8', letterSpacing: 2 }}&gt;核心功能 3 / 3&lt;/Text&gt;&#10;    &lt;/Box&gt;&#10;&#10;    &lt;Box style={{ flex: 1, flexDirection: 'column', padding: '24px 40px', gap: 16 }}&gt;&#10;        &lt;Box style={{ height: 44, flexDirection: 'row', alignItems: 'center', gap: 16 }}&gt;&#10;            &lt;Box style={{ width: 5, height: 34, background: '#1E4FA8', borderRadius: 2 }} /&gt;&#10;            &lt;Text style={{ fontSize: 36, fontWeight: 'bold', color: '#0E3F8C' }}&gt;网页能点，钱花得明白&lt;/Text&gt;&#10;            &lt;Text style={{ fontSize: 17, color: '#8B97A8', marginLeft: 6 }}&gt;命令行没人会用，所以包了一层网页；同时把花钱的两步缓存起来&lt;/Text&gt;&#10;        &lt;/Box&gt;&#10;&#10;        &lt;Box style={{ height: 492, flexDirection: 'row', gap: 24 }}&gt;&#10;            &lt;Box style={{ width: 372, height: 492, background: '#E8EFF8', borderLeft: '5px solid #1E4FA8', borderRadius: 6, padding: '30px 26px', flexDirection: 'column', justifyContent: 'space-between' }}&gt;&#10;                &lt;Box style={{ flexDirection: 'column', gap: 8 }}&gt;&#10;                    &lt;Text style={{ fontSize: 15, color: '#1E4FA8', letterSpacing: 2 }}&gt;讲稿在总花费里的占比&lt;/Text&gt;&#10;                    &lt;Text style={{ fontSize: 76, fontWeight: 'bold', color: '#0E3F8C', lineHeight: 1.05 }}&gt;37–76%&lt;/Text&gt;&#10;                    &lt;Text style={{ fontSize: 16, color: '#4A5568', lineHeight: 1.5 }}&gt;幻灯片返工越多，这个比例越低——钱转移到了幻灯片那一侧&lt;/Text&gt;&#10;                &lt;/Box&gt;&#10;&#10;                &lt;Box style={{ flexDirection: 'column', gap: 8 }}&gt;&#10;                    &lt;Box style={{ height: 1, background: '#B5D4F4' }} /&gt;&#10;                    &lt;Text style={{ fontSize: 15, color: '#4A5568', lineHeight: 1.5 }}&gt;一篇论文的 API token 总量&lt;/Text&gt;&#10;                    &lt;Text style={{ fontSize: 26, fontWeight: 'bold', color: '#0E3F8C' }}&gt;4.8 万 – 10.9 万&lt;/Text&gt;&#10;                &lt;/Box&gt;&#10;            &lt;/Box&gt;&#10;&#10;            &lt;Box style={{ width: 780, height: 492, flexDirection: 'column', gap: 14 }}&gt;&#10;                &lt;Text style={{ fontSize: 18, color: '#1A2230', lineHeight: 1.5 }}&gt;整条链路只有两步要联网花钱：把正文结构化成 LaTeX 工程，以及看幻灯片写讲稿。这两步的产物都按输入指纹存下来了，同一份论文同参数重跑，API 费用为零。&lt;/Text&gt;&#10;&#10;                &lt;Box style={{ height: 240, background: '#F7F9FC', border: '1px solid #D6DCE5', borderRadius: 6, padding: '8px 12px' }}&gt;&#10;                    &lt;Chart&#10;                        style={{ width: '100%', height: 224 }}&#10;                        chartType='barChart'&#10;                        grouping='stacked'&#10;                        title='三个真实样本的 token 构成'&#10;                        titleColor='#0E3F8C'&#10;                        showLegend={true}&#10;                        showDataLabels={true}&#10;                        legendColor='#4A5568'&#10;                        axisColor='#8B97A8'&#10;                        dataLabelColor='#1A2230'&#10;                        colors={['#1E4FA8', '#85B7EB']}&#10;                        data={[&#10;                            ['样本', '幻灯片桶', '讲稿桶'],&#10;                            ['英文论文 · 无返工', 13265, 42343],&#10;                            ['中文论文 · 1 次返工', 38391, 31569],&#10;                            ['中文论文 · 多次返工', 68409, 40241],&#10;                        ]}&#10;                    /&gt;&#10;                &lt;/Box&gt;&#10;&#10;                &lt;Box style={{ flex: 1, background: '#F7F9FC', border: '1px solid #D6DCE5', borderRadius: 6, padding: '14px 18px', flexDirection: 'column', justifyContent: 'center', gap: 6 }}&gt;&#10;                    &lt;Text style={{ fontSize: 15, fontWeight: 'bold', color: '#1E4FA8', letterSpacing: 1 }}&gt;为什么要把区间写出来&lt;/Text&gt;&#10;                    &lt;Text style={{ fontSize: 16, color: '#4A5568', lineHeight: 1.45 }}&gt;我早期的笔记里只有一个数：约 5.6 万 token，讲稿占 76%。后来把全部样本统计了一遍才发现，那只是一个幻灯片一次都没返工的样本。幻灯片一旦要改，总花费接近翻倍，占比结构也跟着变。所以我把它改成了区间。&lt;/Text&gt;&#10;                &lt;/Box&gt;&#10;            &lt;/Box&gt;&#10;        &lt;/Box&gt;&#10;    &lt;/Box&gt;&#10;&#10;    &lt;Box style={{ height: 48, padding: '0 40px', flexDirection: 'row', alignItems: 'center', justifyContent: 'space-between' }}&gt;&#10;        &lt;Text style={{ fontSize: 14, color: '#8B97A8' }}&gt;数据来源：各任务的 token.json，按&quot;幻灯片桶 + 讲稿桶&quot;统计&lt;/Text&gt;&#10;        &lt;Text style={{ fontSize: 16, fontWeight: 'bold', color: '#0E3F8C' }}&gt;08 / 15&lt;/Text&gt;&#10;    &lt;/Box&gt;&#10;&lt;/Slide&gt;&#10;"/>
+        <p:cNvPr id="350" name="" descr="&lt;Slide style={{ width: 1280, height: 720, display: 'flex', flexDirection: 'column', background: '#FFFFFF', fontFamily: &quot;'Microsoft YaHei', 'PingFang SC', 'Noto Sans CJK SC', sans-serif&quot;, padding: 0 }}&gt;&#10;    &lt;Box style={{ height: 72, background: '#0E3F8C', flexDirection: 'row', alignItems: 'center', justifyContent: 'space-between', padding: '0 40px' }}&gt;&#10;        &lt;Text style={{ fontSize: 20, fontWeight: 'bold', color: '#FFFFFF' }}&gt;Paper2Video 项目汇报&lt;/Text&gt;&#10;        &lt;Text style={{ fontSize: 16, color: '#8FB6E8', letterSpacing: 2 }}&gt;核心功能 3 / 3&lt;/Text&gt;&#10;    &lt;/Box&gt;&#10;&#10;    &lt;Box style={{ flex: 1, flexDirection: 'column', padding: '24px 40px', gap: 16 }}&gt;&#10;        &lt;Box style={{ height: 44, flexDirection: 'row', alignItems: 'center', gap: 16 }}&gt;&#10;            &lt;Box style={{ width: 5, height: 34, background: '#1E4FA8', borderRadius: 2 }} /&gt;&#10;            &lt;Text style={{ fontSize: 36, fontWeight: 'bold', color: '#0E3F8C' }}&gt;网页能点，钱花在明处&lt;/Text&gt;&#10;            &lt;Text style={{ fontSize: 17, color: '#8B97A8', marginLeft: 6 }}&gt;要联网的只有三步，产物按输入指纹存下来&lt;/Text&gt;&#10;        &lt;/Box&gt;&#10;&#10;        &lt;Box style={{ height: 492, flexDirection: 'row', gap: 24 }}&gt;&#10;            &lt;Box style={{ width: 372, height: 492, background: '#E8EFF8', borderLeft: '5px solid #1E4FA8', borderRadius: 6, padding: '30px 26px', flexDirection: 'column', justifyContent: 'space-between' }}&gt;&#10;                &lt;Box style={{ flexDirection: 'column', gap: 8 }}&gt;&#10;                    &lt;Text style={{ fontSize: 15, color: '#1E4FA8', letterSpacing: 2 }}&gt;同一篇论文 · 一次生成&lt;/Text&gt;&#10;                    &lt;Text style={{ fontSize: 76, fontWeight: 'bold', color: '#0E3F8C', lineHeight: 1.05 }}&gt;6.9万&lt;/Text&gt;&#10;                    &lt;Text style={{ fontSize: 16, color: '#4A5568', lineHeight: 1.5 }}&gt;幻灯片与讲稿这两步合计的 token，全部来自同一篇、同一次运行&lt;/Text&gt;&#10;                &lt;/Box&gt;&#10;&#10;                &lt;Box style={{ flexDirection: 'column', gap: 8 }}&gt;&#10;                    &lt;Box style={{ height: 1, background: '#B5D4F4' }} /&gt;&#10;                    &lt;Text style={{ fontSize: 15, color: '#4A5568', lineHeight: 1.5 }}&gt;命中缓存后，同参数再跑一次&lt;/Text&gt;&#10;                    &lt;Text style={{ fontSize: 30, fontWeight: 'bold', color: '#0E3F8C' }}&gt;0 次联网调用&lt;/Text&gt;&#10;                &lt;/Box&gt;&#10;            &lt;/Box&gt;&#10;&#10;            &lt;Box style={{ width: 780, height: 492, flexDirection: 'column', gap: 14 }}&gt;&#10;                &lt;Text style={{ fontSize: 18, color: '#1A2230', lineHeight: 1.5 }}&gt;要调云端的是这三步：把正文结构化成 LaTeX 工程、生成幻灯片、写讲稿与光标描述。它们的产物各按输入指纹存一份，命中就整段跳过，不重复计费。&lt;/Text&gt;&#10;&#10;                &lt;Box style={{ height: 240, background: '#F7F9FC', border: '1px solid #D6DCE5', borderRadius: 6, padding: '8px 12px' }}&gt;&#10;                    &lt;Chart&#10;                        style={{ width: '100%', height: 224 }}&#10;                        chartType='barChart'&#10;                        barDirection='column'&#10;                        grouping='clustered'&#10;                        title='这一篇论文，钱花在哪（token）'&#10;                        titleColor='#0E3F8C'&#10;                        showLegend={false}&#10;                        showDataLabels={true}&#10;                        axisColor='#8B97A8'&#10;                        dataLabelColor='#1A2230'&#10;                        colors={['#1E4FA8']}&#10;                        data={[&#10;                            ['环节', 'token'],&#10;                            ['生成幻灯片 · 首次', 28525],&#10;                            ['生成幻灯片 · 返工 1 次', 9866],&#10;                            ['讲稿与光标描述', 31569],&#10;                        ]}&#10;                    /&gt;&#10;                &lt;/Box&gt;&#10;&#10;                &lt;Box style={{ flex: 1, background: '#F7F9FC', border: '1px solid #D6DCE5', borderRadius: 6, padding: '14px 18px', flexDirection: 'column', justifyContent: 'center', gap: 6 }}&gt;&#10;                    &lt;Text style={{ fontSize: 15, fontWeight: 'bold', color: '#1E4FA8', letterSpacing: 1 }}&gt;为什么只放同一篇的数据&lt;/Text&gt;&#10;                    &lt;Text style={{ fontSize: 16, color: '#4A5568', lineHeight: 1.45 }}&gt;换一篇论文，token 数立刻被两件事改写：论文有多长，以及幻灯片要返工几次。所以不同论文之间的数字没法互相比较——这一页只给同一篇内部的构成，那才是能对齐着看的。&lt;/Text&gt;&#10;                &lt;/Box&gt;&#10;            &lt;/Box&gt;&#10;        &lt;/Box&gt;&#10;    &lt;/Box&gt;&#10;&#10;    &lt;Box style={{ height: 48, padding: '0 40px', flexDirection: 'row', alignItems: 'center', justifyContent: 'space-between' }}&gt;&#10;        &lt;Text style={{ fontSize: 14, color: '#8B97A8' }}&gt;数据来源：一次完整跑通的任务，token.json 按&quot;幻灯片桶 + 讲稿桶&quot;拆分&lt;/Text&gt;&#10;        &lt;Text style={{ fontSize: 16, fontWeight: 'bold', color: '#0E3F8C' }}&gt;08 / 15&lt;/Text&gt;&#10;    &lt;/Box&gt;&#10;&lt;/Slide&gt;&#10;"/>
         <p:cNvGrpSpPr/>
         <p:nvPr/>
       </p:nvGrpSpPr>
@@ -17112,7 +17370,7 @@
                 <a:latin typeface="Microsoft YaHei"/>
                 <a:ea typeface="Microsoft YaHei"/>
               </a:rPr>
-              <a:t>网页能点，钱花得明白</a:t>
+              <a:t>网页能点，钱花在明处</a:t>
             </a:r>
             <a:endParaRPr/>
           </a:p>
@@ -17127,7 +17385,7 @@
         <p:spPr>
           <a:xfrm rot="0" flipH="0" flipV="0">
             <a:off x="4219575" y="1028700"/>
-            <a:ext cx="4695825" cy="200025"/>
+            <a:ext cx="3076575" cy="200025"/>
           </a:xfrm>
           <a:prstGeom prst="rect"/>
         </p:spPr>
@@ -17147,7 +17405,7 @@
                 <a:latin typeface="Microsoft YaHei"/>
                 <a:ea typeface="Microsoft YaHei"/>
               </a:rPr>
-              <a:t>命令行没人会用，所以包了一层网页；同时把花钱的两步缓存起来</a:t>
+              <a:t>要联网的只有三步，产物按输入指纹存下来</a:t>
             </a:r>
             <a:endParaRPr/>
           </a:p>
@@ -17265,7 +17523,27 @@
                 <a:latin typeface="Microsoft YaHei"/>
                 <a:ea typeface="Microsoft YaHei"/>
               </a:rPr>
-              <a:t>讲稿在总花费里的占比</a:t>
+              <a:t>同一篇论文</a:t>
+            </a:r>
+            <a:r>
+              <a:rPr lang="en-US" sz="1125" spc="150">
+                <a:solidFill>
+                  <a:srgbClr val="1E4FA8"/>
+                </a:solidFill>
+                <a:latin typeface="Microsoft YaHei"/>
+                <a:ea typeface="Microsoft YaHei"/>
+              </a:rPr>
+              <a:t> · </a:t>
+            </a:r>
+            <a:r>
+              <a:rPr lang="zh-CN" sz="1125" spc="150">
+                <a:solidFill>
+                  <a:srgbClr val="1E4FA8"/>
+                </a:solidFill>
+                <a:latin typeface="Microsoft YaHei"/>
+                <a:ea typeface="Microsoft YaHei"/>
+              </a:rPr>
+              <a:t>一次生成</a:t>
             </a:r>
             <a:endParaRPr/>
           </a:p>
@@ -17300,7 +17578,17 @@
                 <a:latin typeface="Microsoft YaHei"/>
                 <a:ea typeface="Microsoft YaHei"/>
               </a:rPr>
-              <a:t>37–76%</a:t>
+              <a:t>6.9</a:t>
+            </a:r>
+            <a:r>
+              <a:rPr lang="zh-CN" sz="5700" b="1">
+                <a:solidFill>
+                  <a:srgbClr val="0E3F8C"/>
+                </a:solidFill>
+                <a:latin typeface="Microsoft YaHei"/>
+                <a:ea typeface="Microsoft YaHei"/>
+              </a:rPr>
+              <a:t>万</a:t>
             </a:r>
             <a:endParaRPr/>
           </a:p>
@@ -17337,7 +17625,27 @@
                 <a:latin typeface="Microsoft YaHei"/>
                 <a:ea typeface="Microsoft YaHei"/>
               </a:rPr>
-              <a:t>幻灯片返工越多，这个比例越低——钱转移到了幻灯片那一侧</a:t>
+              <a:t>幻灯片与讲稿这两步合计的</a:t>
+            </a:r>
+            <a:r>
+              <a:rPr lang="en-US" sz="1200">
+                <a:solidFill>
+                  <a:srgbClr val="4A5568"/>
+                </a:solidFill>
+                <a:latin typeface="Microsoft YaHei"/>
+                <a:ea typeface="Microsoft YaHei"/>
+              </a:rPr>
+              <a:t> token</a:t>
+            </a:r>
+            <a:r>
+              <a:rPr lang="zh-CN" sz="1200">
+                <a:solidFill>
+                  <a:srgbClr val="4A5568"/>
+                </a:solidFill>
+                <a:latin typeface="Microsoft YaHei"/>
+                <a:ea typeface="Microsoft YaHei"/>
+              </a:rPr>
+              <a:t>，全部来自同一篇、同一次运行</a:t>
             </a:r>
             <a:endParaRPr/>
           </a:p>
@@ -17351,7 +17659,7 @@
         </p:nvSpPr>
         <p:spPr>
           <a:xfrm rot="0" flipH="0" flipV="0">
-            <a:off x="676275" y="5162550"/>
+            <a:off x="676275" y="5124450"/>
             <a:ext cx="3000375" cy="9525"/>
           </a:xfrm>
           <a:prstGeom prst="rect">
@@ -17375,7 +17683,7 @@
         </p:nvSpPr>
         <p:spPr>
           <a:xfrm rot="0" flipH="0" flipV="0">
-            <a:off x="676275" y="5248275"/>
+            <a:off x="676275" y="5210175"/>
             <a:ext cx="3000375" cy="257175"/>
           </a:xfrm>
           <a:prstGeom prst="rect"/>
@@ -17396,27 +17704,7 @@
                 <a:latin typeface="Microsoft YaHei"/>
                 <a:ea typeface="Microsoft YaHei"/>
               </a:rPr>
-              <a:t>一篇论文的</a:t>
-            </a:r>
-            <a:r>
-              <a:rPr lang="en-US" sz="1125">
-                <a:solidFill>
-                  <a:srgbClr val="4A5568"/>
-                </a:solidFill>
-                <a:latin typeface="Microsoft YaHei"/>
-                <a:ea typeface="Microsoft YaHei"/>
-              </a:rPr>
-              <a:t> API token </a:t>
-            </a:r>
-            <a:r>
-              <a:rPr lang="zh-CN" sz="1125">
-                <a:solidFill>
-                  <a:srgbClr val="4A5568"/>
-                </a:solidFill>
-                <a:latin typeface="Microsoft YaHei"/>
-                <a:ea typeface="Microsoft YaHei"/>
-              </a:rPr>
-              <a:t>总量</a:t>
+              <a:t>命中缓存后，同参数再跑一次</a:t>
             </a:r>
             <a:endParaRPr/>
           </a:p>
@@ -17430,8 +17718,8 @@
         </p:nvSpPr>
         <p:spPr>
           <a:xfrm rot="0" flipH="0" flipV="0">
-            <a:off x="676275" y="5581650"/>
-            <a:ext cx="3000375" cy="304800"/>
+            <a:off x="676275" y="5543550"/>
+            <a:ext cx="3000375" cy="342900"/>
           </a:xfrm>
           <a:prstGeom prst="rect"/>
         </p:spPr>
@@ -17444,44 +17732,24 @@
               </a:lnSpc>
             </a:pPr>
             <a:r>
-              <a:rPr lang="en-US" sz="1950" b="1">
+              <a:rPr lang="en-US" sz="2250" b="1">
                 <a:solidFill>
                   <a:srgbClr val="0E3F8C"/>
                 </a:solidFill>
                 <a:latin typeface="Microsoft YaHei"/>
                 <a:ea typeface="Microsoft YaHei"/>
               </a:rPr>
-              <a:t>4.8 </a:t>
-            </a:r>
-            <a:r>
-              <a:rPr lang="zh-CN" sz="1950" b="1">
+              <a:t>0 </a:t>
+            </a:r>
+            <a:r>
+              <a:rPr lang="zh-CN" sz="2250" b="1">
                 <a:solidFill>
                   <a:srgbClr val="0E3F8C"/>
                 </a:solidFill>
                 <a:latin typeface="Microsoft YaHei"/>
                 <a:ea typeface="Microsoft YaHei"/>
               </a:rPr>
-              <a:t>万</a:t>
-            </a:r>
-            <a:r>
-              <a:rPr lang="en-US" sz="1950" b="1">
-                <a:solidFill>
-                  <a:srgbClr val="0E3F8C"/>
-                </a:solidFill>
-                <a:latin typeface="Microsoft YaHei"/>
-                <a:ea typeface="Microsoft YaHei"/>
-              </a:rPr>
-              <a:t> – 10.9 </a:t>
-            </a:r>
-            <a:r>
-              <a:rPr lang="zh-CN" sz="1950" b="1">
-                <a:solidFill>
-                  <a:srgbClr val="0E3F8C"/>
-                </a:solidFill>
-                <a:latin typeface="Microsoft YaHei"/>
-                <a:ea typeface="Microsoft YaHei"/>
-              </a:rPr>
-              <a:t>万</a:t>
+              <a:t>次联网调用</a:t>
             </a:r>
             <a:endParaRPr/>
           </a:p>
@@ -17518,7 +17786,7 @@
                 <a:latin typeface="Microsoft YaHei"/>
                 <a:ea typeface="Microsoft YaHei"/>
               </a:rPr>
-              <a:t>整条链路只有两步要联网花钱：把正文结构化成</a:t>
+              <a:t>要调云端的是这三步：把正文结构化成</a:t>
             </a:r>
             <a:r>
               <a:rPr lang="en-US" sz="1350">
@@ -17538,27 +17806,7 @@
                 <a:latin typeface="Microsoft YaHei"/>
                 <a:ea typeface="Microsoft YaHei"/>
               </a:rPr>
-              <a:t>工程，以及看幻灯片写讲稿。这两步的产物都按输入指纹存下来了，同一份论文同参数重跑，</a:t>
-            </a:r>
-            <a:r>
-              <a:rPr lang="en-US" sz="1350">
-                <a:solidFill>
-                  <a:srgbClr val="1A2230"/>
-                </a:solidFill>
-                <a:latin typeface="Microsoft YaHei"/>
-                <a:ea typeface="Microsoft YaHei"/>
-              </a:rPr>
-              <a:t>API </a:t>
-            </a:r>
-            <a:r>
-              <a:rPr lang="zh-CN" sz="1350">
-                <a:solidFill>
-                  <a:srgbClr val="1A2230"/>
-                </a:solidFill>
-                <a:latin typeface="Microsoft YaHei"/>
-                <a:ea typeface="Microsoft YaHei"/>
-              </a:rPr>
-              <a:t>费用为零。</a:t>
+              <a:t>工程、生成幻灯片、写讲稿与光标描述。它们的产物各按输入指纹存一份，命中就整段跳过，不重复计费。</a:t>
             </a:r>
             <a:endParaRPr/>
           </a:p>
@@ -17650,7 +17898,7 @@
         </p:nvSpPr>
         <p:spPr>
           <a:xfrm rot="0" flipH="0" flipV="0">
-            <a:off x="4324350" y="4905375"/>
+            <a:off x="4324350" y="5038725"/>
             <a:ext cx="7086600" cy="171450"/>
           </a:xfrm>
           <a:prstGeom prst="rect"/>
@@ -17671,7 +17919,7 @@
                 <a:latin typeface="Microsoft YaHei"/>
                 <a:ea typeface="Microsoft YaHei"/>
               </a:rPr>
-              <a:t>为什么要把区间写出来</a:t>
+              <a:t>为什么只放同一篇的数据</a:t>
             </a:r>
             <a:endParaRPr/>
           </a:p>
@@ -17685,8 +17933,8 @@
         </p:nvSpPr>
         <p:spPr>
           <a:xfrm rot="0" flipH="0" flipV="0">
-            <a:off x="4324350" y="5133975"/>
-            <a:ext cx="7086600" cy="800100"/>
+            <a:off x="4324350" y="5267325"/>
+            <a:ext cx="7086600" cy="533400"/>
           </a:xfrm>
           <a:prstGeom prst="rect"/>
         </p:spPr>
@@ -17708,7 +17956,7 @@
                 <a:latin typeface="Microsoft YaHei"/>
                 <a:ea typeface="Microsoft YaHei"/>
               </a:rPr>
-              <a:t>我早期的笔记里只有一个数：约</a:t>
+              <a:t>换一篇论文，</a:t>
             </a:r>
             <a:r>
               <a:rPr lang="en-US" sz="1200">
@@ -17718,7 +17966,7 @@
                 <a:latin typeface="Microsoft YaHei"/>
                 <a:ea typeface="Microsoft YaHei"/>
               </a:rPr>
-              <a:t> 5.6 </a:t>
+              <a:t>token </a:t>
             </a:r>
             <a:r>
               <a:rPr lang="zh-CN" sz="1200">
@@ -17728,47 +17976,7 @@
                 <a:latin typeface="Microsoft YaHei"/>
                 <a:ea typeface="Microsoft YaHei"/>
               </a:rPr>
-              <a:t>万</a:t>
-            </a:r>
-            <a:r>
-              <a:rPr lang="en-US" sz="1200">
-                <a:solidFill>
-                  <a:srgbClr val="4A5568"/>
-                </a:solidFill>
-                <a:latin typeface="Microsoft YaHei"/>
-                <a:ea typeface="Microsoft YaHei"/>
-              </a:rPr>
-              <a:t> token</a:t>
-            </a:r>
-            <a:r>
-              <a:rPr lang="zh-CN" sz="1200">
-                <a:solidFill>
-                  <a:srgbClr val="4A5568"/>
-                </a:solidFill>
-                <a:latin typeface="Microsoft YaHei"/>
-                <a:ea typeface="Microsoft YaHei"/>
-              </a:rPr>
-              <a:t>，讲稿占</a:t>
-            </a:r>
-            <a:r>
-              <a:rPr lang="en-US" sz="1200">
-                <a:solidFill>
-                  <a:srgbClr val="4A5568"/>
-                </a:solidFill>
-                <a:latin typeface="Microsoft YaHei"/>
-                <a:ea typeface="Microsoft YaHei"/>
-              </a:rPr>
-              <a:t> 76%</a:t>
-            </a:r>
-            <a:r>
-              <a:rPr lang="zh-CN" sz="1200">
-                <a:solidFill>
-                  <a:srgbClr val="4A5568"/>
-                </a:solidFill>
-                <a:latin typeface="Microsoft YaHei"/>
-                <a:ea typeface="Microsoft YaHei"/>
-              </a:rPr>
-              <a:t>。后来把全部样本统计了一遍才发现，那只是一个幻灯片一次都没返工的样本。幻灯片一旦要改，总花费接近翻倍，占比结构也跟着变。所以我把它改成了区间。</a:t>
+              <a:t>数立刻被两件事改写：论文有多长，以及幻灯片要返工几次。所以不同论文之间的数字没法互相比较——这一页只给同一篇内部的构成，那才是能对齐着看的。</a:t>
             </a:r>
             <a:endParaRPr/>
           </a:p>
@@ -17783,7 +17991,7 @@
         <p:spPr>
           <a:xfrm rot="0" flipH="0" flipV="0">
             <a:off x="381000" y="6553200"/>
-            <a:ext cx="3667125" cy="161925"/>
+            <a:ext cx="4333875" cy="161925"/>
           </a:xfrm>
           <a:prstGeom prst="rect"/>
         </p:spPr>
@@ -17803,7 +18011,7 @@
                 <a:latin typeface="Microsoft YaHei"/>
                 <a:ea typeface="Microsoft YaHei"/>
               </a:rPr>
-              <a:t>数据来源：各任务的</a:t>
+              <a:t>数据来源：一次完整跑通的任务，</a:t>
             </a:r>
             <a:r>
               <a:rPr lang="en-US" sz="1050">
@@ -17813,7 +18021,7 @@
                 <a:latin typeface="Microsoft YaHei"/>
                 <a:ea typeface="Microsoft YaHei"/>
               </a:rPr>
-              <a:t> token.json</a:t>
+              <a:t>token.json </a:t>
             </a:r>
             <a:r>
               <a:rPr lang="zh-CN" sz="1050">
@@ -17823,7 +18031,7 @@
                 <a:latin typeface="Microsoft YaHei"/>
                 <a:ea typeface="Microsoft YaHei"/>
               </a:rPr>
-              <a:t>，按</a:t>
+              <a:t>按</a:t>
             </a:r>
             <a:r>
               <a:rPr lang="en-US" sz="1050">
@@ -17883,7 +18091,7 @@
                 <a:latin typeface="Microsoft YaHei"/>
                 <a:ea typeface="Microsoft YaHei"/>
               </a:rPr>
-              <a:t>统计</a:t>
+              <a:t>拆分</a:t>
             </a:r>
             <a:endParaRPr/>
           </a:p>
@@ -17934,7 +18142,7 @@
   <p:cSld>
     <p:spTree>
       <p:nvGrpSpPr>
-        <p:cNvPr id="374" name="" descr="&lt;Slide style={{ width: 1280, height: 720, display: 'flex', flexDirection: 'column', background: '#FFFFFF', fontFamily: &quot;'Microsoft YaHei', 'PingFang SC', 'Noto Sans CJK SC', sans-serif&quot;, padding: 0 }}&gt;&#10;    &lt;Box style={{ height: 72, background: '#0E3F8C', flexDirection: 'row', alignItems: 'center', justifyContent: 'space-between', padding: '0 40px' }}&gt;&#10;        &lt;Text style={{ fontSize: 20, fontWeight: 'bold', color: '#FFFFFF' }}&gt;Paper2Video 项目汇报&lt;/Text&gt;&#10;        &lt;Text style={{ fontSize: 16, color: '#8FB6E8', letterSpacing: 2 }}&gt;难点 1 / 4&lt;/Text&gt;&#10;    &lt;/Box&gt;&#10;&#10;    &lt;Box style={{ flex: 1, flexDirection: 'column', padding: '24px 40px', gap: 16 }}&gt;&#10;        &lt;Box style={{ height: 44, flexDirection: 'row', alignItems: 'center', gap: 16 }}&gt;&#10;            &lt;Box style={{ width: 5, height: 34, background: '#1E4FA8', borderRadius: 2 }} /&gt;&#10;            &lt;Text style={{ fontSize: 36, fontWeight: 'bold', color: '#0E3F8C' }}&gt;数字人换了三次&lt;/Text&gt;&#10;            &lt;Text style={{ fontSize: 17, color: '#8B97A8', marginLeft: 6 }}&gt;论文用的那个，在这张卡上一步都走不动&lt;/Text&gt;&#10;        &lt;/Box&gt;&#10;&#10;        &lt;Box style={{ height: 492, flexDirection: 'row', gap: 24 }}&gt;&#10;            &lt;Box style={{ width: 660, height: 492, flexDirection: 'column', gap: 12 }}&gt;&#10;                &lt;Box style={{ width: 660, height: 316, flexDirection: 'row', gap: 22 }}&gt;&#10;                    &lt;Box style={{ width: 205, height: 316, background: '#F7F9FC', border: '1px solid #D6DCE5', borderRadius: 6, padding: 4 }}&gt;&#10;                        &lt;Image src='assets/dh_frame_00.png' style={{ width: 195, height: 306, objectFit: 'cover' }} /&gt;&#10;                    &lt;/Box&gt;&#10;                    &lt;Box style={{ width: 205, height: 316, background: '#F7F9FC', border: '1px solid #D6DCE5', borderRadius: 6, padding: 4 }}&gt;&#10;                        &lt;Image src='assets/dh_frame_06.png' style={{ width: 195, height: 306, objectFit: 'cover' }} /&gt;&#10;                    &lt;/Box&gt;&#10;                    &lt;Box style={{ width: 205, height: 316, background: '#F7F9FC', border: '1px solid #D6DCE5', borderRadius: 6, padding: 4 }}&gt;&#10;                        &lt;Image src='assets/dh_frame_14.png' style={{ width: 195, height: 306, objectFit: 'cover' }} /&gt;&#10;                    &lt;/Box&gt;&#10;                &lt;/Box&gt;&#10;&#10;                &lt;Text style={{ fontSize: 14, color: '#8B97A8', lineHeight: 1.4 }}&gt;从本机跑出来的数字人片段里抽的帧：第 1 页、第 7 页、第 15 页。是产物，不是效果图。&lt;/Text&gt;&#10;&#10;                &lt;Box style={{ flex: 1, background: '#E8EFF8', borderLeft: '4px solid #1E4FA8', borderRadius: 4, padding: '14px 18px', flexDirection: 'row', alignItems: 'center', gap: 26 }}&gt;&#10;                    &lt;Box style={{ flexDirection: 'column', gap: 2 }}&gt;&#10;                        &lt;Text style={{ fontSize: 44, fontWeight: 'bold', color: '#0E3F8C', lineHeight: 1.05 }}&gt;3.8GB&lt;/Text&gt;&#10;                        &lt;Text style={{ fontSize: 14, color: '#4A5568' }}&gt;最终模型的权重体积&lt;/Text&gt;&#10;                    &lt;/Box&gt;&#10;                    &lt;Box style={{ width: 1, height: 58, background: '#B5D4F4' }} /&gt;&#10;                    &lt;Box style={{ flexDirection: 'column', gap: 2 }}&gt;&#10;                        &lt;Text style={{ fontSize: 44, fontWeight: 'bold', color: '#0E3F8C', lineHeight: 1.05 }}&gt;1024&lt;/Text&gt;&#10;                        &lt;Text style={{ fontSize: 14, color: '#4A5568' }}&gt;注意力序列长度，比上一代小约 1270 倍&lt;/Text&gt;&#10;                    &lt;/Box&gt;&#10;                &lt;/Box&gt;&#10;            &lt;/Box&gt;&#10;&#10;            &lt;Box style={{ width: 516, height: 492, flexDirection: 'column', gap: 12 }}&gt;&#10;                &lt;Text style={{ fontSize: 18, color: '#1A2230', lineHeight: 1.45 }}&gt;为了把数字人跑起来，我换过三次模型。每一次都是被一个具体的障碍挡下来的。&lt;/Text&gt;&#10;&#10;                &lt;Box style={{ height: 306, flexDirection: 'column', gap: 8 }}&gt;&#10;                    &lt;Box style={{ flex: 1, flexDirection: 'row', gap: 12, alignItems: 'flex-start' }}&gt;&#10;                        &lt;Box style={{ width: 24, height: 24, background: '#8B97A8', borderRadius: 4, alignItems: 'center', justifyContent: 'center' }}&gt;&#10;                            &lt;Text style={{ fontSize: 14, fontWeight: 'bold', color: '#FFFFFF' }}&gt;1&lt;/Text&gt;&#10;                        &lt;/Box&gt;&#10;                        &lt;Box style={{ flex: 1, flexDirection: 'column', gap: 2 }}&gt;&#10;                            &lt;Text style={{ fontSize: 18, fontWeight: 'bold', color: '#1A2230' }}&gt;Hallo2 · 论文原方案&lt;/Text&gt;&#10;                            &lt;Text style={{ fontSize: 15, color: '#4A5568', lineHeight: 1.4 }}&gt;锁死 CUDA 11.8，编译目标里根本没有这台卡，直接出局&lt;/Text&gt;&#10;                        &lt;/Box&gt;&#10;                    &lt;/Box&gt;&#10;&#10;                    &lt;Box style={{ flex: 1, flexDirection: 'row', gap: 12, alignItems: 'flex-start' }}&gt;&#10;                        &lt;Box style={{ width: 24, height: 24, background: '#8B97A8', borderRadius: 4, alignItems: 'center', justifyContent: 'center' }}&gt;&#10;                            &lt;Text style={{ fontSize: 14, fontWeight: 'bold', color: '#FFFFFF' }}&gt;2&lt;/Text&gt;&#10;                        &lt;/Box&gt;&#10;                        &lt;Box style={{ flex: 1, flexDirection: 'column', gap: 2 }}&gt;&#10;                            &lt;Text style={{ fontSize: 18, fontWeight: 'bold', color: '#1A2230' }}&gt;InfiniteTalk&lt;/Text&gt;&#10;                            &lt;Text style={{ fontSize: 15, color: '#4A5568', lineHeight: 1.4 }}&gt;用 fp8 加载会触发算子现场编译，而本机编译器不认识新的计算能力代号&lt;/Text&gt;&#10;                        &lt;/Box&gt;&#10;                    &lt;/Box&gt;&#10;&#10;                    &lt;Box style={{ flex: 1, flexDirection: 'row', gap: 12, alignItems: 'flex-start' }}&gt;&#10;                        &lt;Box style={{ width: 24, height: 24, background: '#8B97A8', borderRadius: 4, alignItems: 'center', justifyContent: 'center' }}&gt;&#10;                            &lt;Text style={{ fontSize: 14, fontWeight: 'bold', color: '#FFFFFF' }}&gt;3&lt;/Text&gt;&#10;                        &lt;/Box&gt;&#10;                        &lt;Box style={{ flex: 1, flexDirection: 'column', gap: 2 }}&gt;&#10;                            &lt;Text style={{ fontSize: 18, fontWeight: 'bold', color: '#1A2230' }}&gt;LongCat-Video-Avatar&lt;/Text&gt;&#10;                            &lt;Text style={{ fontSize: 15, color: '#4A5568', lineHeight: 1.4 }}&gt;不用现场编译了，但权重 41.7GB、依赖一个装不上的注意力库，单卡放不下&lt;/Text&gt;&#10;                        &lt;/Box&gt;&#10;                    &lt;/Box&gt;&#10;&#10;                    &lt;Box style={{ flex: 1, flexDirection: 'row', gap: 12, alignItems: 'flex-start' }}&gt;&#10;                        &lt;Box style={{ width: 24, height: 24, background: '#1E4FA8', borderRadius: 4, alignItems: 'center', justifyContent: 'center' }}&gt;&#10;                            &lt;Text style={{ fontSize: 14, fontWeight: 'bold', color: '#FFFFFF' }}&gt;4&lt;/Text&gt;&#10;                        &lt;/Box&gt;&#10;                        &lt;Box style={{ flex: 1, flexDirection: 'column', gap: 2 }}&gt;&#10;                            &lt;Text style={{ fontSize: 18, fontWeight: 'bold', color: '#0E3F8C' }}&gt;MuseTalk · 现在用的&lt;/Text&gt;&#10;                            &lt;Text style={{ fontSize: 15, color: '#4A5568', lineHeight: 1.4 }}&gt;只做人脸那 256×256 一块，注意力序列短了三个数量级，用标准实现就够&lt;/Text&gt;&#10;                        &lt;/Box&gt;&#10;                    &lt;/Box&gt;&#10;                &lt;/Box&gt;&#10;&#10;                &lt;Box style={{ flex: 1, background: '#F7F9FC', border: '1px solid #D6DCE5', borderRadius: 6, padding: '12px 16px', flexDirection: 'column', justifyContent: 'center', gap: 4 }}&gt;&#10;                    &lt;Text style={{ fontSize: 15, fontWeight: 'bold', color: '#1E4FA8', letterSpacing: 1 }}&gt;代价说清楚&lt;/Text&gt;&#10;                    &lt;Text style={{ fontSize: 15, color: '#4A5568', lineHeight: 1.45 }}&gt;这三次不是反复试错，是障碍一个一个被排除。MuseTalk 只做头部，画质不如论文原来那个——这是换来的代价。&lt;/Text&gt;&#10;                &lt;/Box&gt;&#10;            &lt;/Box&gt;&#10;        &lt;/Box&gt;&#10;    &lt;/Box&gt;&#10;&#10;    &lt;Box style={{ height: 48, padding: '0 40px', flexDirection: 'row', alignItems: 'center', justifyContent: 'space-between' }}&gt;&#10;        &lt;Text style={{ fontSize: 14, color: '#8B97A8' }}&gt;序列长度对比：LongCat 36480 → MuseTalk 1024&lt;/Text&gt;&#10;        &lt;Text style={{ fontSize: 16, fontWeight: 'bold', color: '#0E3F8C' }}&gt;09 / 15&lt;/Text&gt;&#10;    &lt;/Box&gt;&#10;&lt;/Slide&gt;&#10;"/>
+        <p:cNvPr id="374" name=""/>
         <p:cNvGrpSpPr/>
         <p:nvPr/>
       </p:nvGrpSpPr>
@@ -17967,7 +18175,10 @@
         </p:spPr>
         <p:txBody>
           <a:bodyPr/>
-          <a:p/>
+          <a:p>
+            <a:pPr/>
+            <a:endParaRPr/>
+          </a:p>
         </p:txBody>
       </p:sp>
       <p:sp>
@@ -17991,7 +18202,10 @@
         </p:spPr>
         <p:txBody>
           <a:bodyPr/>
-          <a:p/>
+          <a:p>
+            <a:pPr/>
+            <a:endParaRPr/>
+          </a:p>
         </p:txBody>
       </p:sp>
       <p:sp>
@@ -18107,7 +18321,10 @@
         </p:spPr>
         <p:txBody>
           <a:bodyPr/>
-          <a:p/>
+          <a:p>
+            <a:pPr/>
+            <a:endParaRPr/>
+          </a:p>
         </p:txBody>
       </p:sp>
       <p:sp>
@@ -18208,7 +18425,10 @@
         </p:spPr>
         <p:txBody>
           <a:bodyPr/>
-          <a:p/>
+          <a:p>
+            <a:pPr/>
+            <a:endParaRPr/>
+          </a:p>
         </p:txBody>
       </p:sp>
       <p:pic>
@@ -18265,7 +18485,10 @@
         </p:spPr>
         <p:txBody>
           <a:bodyPr/>
-          <a:p/>
+          <a:p>
+            <a:pPr/>
+            <a:endParaRPr/>
+          </a:p>
         </p:txBody>
       </p:sp>
       <p:pic>
@@ -18322,7 +18545,10 @@
         </p:spPr>
         <p:txBody>
           <a:bodyPr/>
-          <a:p/>
+          <a:p>
+            <a:pPr/>
+            <a:endParaRPr/>
+          </a:p>
         </p:txBody>
       </p:sp>
       <p:pic>
@@ -18469,7 +18695,10 @@
         </p:spPr>
         <p:txBody>
           <a:bodyPr/>
-          <a:p/>
+          <a:p>
+            <a:pPr/>
+            <a:endParaRPr/>
+          </a:p>
         </p:txBody>
       </p:sp>
       <p:sp>
@@ -18516,7 +18745,10 @@
         </p:spPr>
         <p:txBody>
           <a:bodyPr/>
-          <a:p/>
+          <a:p>
+            <a:pPr/>
+            <a:endParaRPr/>
+          </a:p>
         </p:txBody>
       </p:sp>
       <p:sp>
@@ -18610,7 +18842,10 @@
         </p:spPr>
         <p:txBody>
           <a:bodyPr/>
-          <a:p/>
+          <a:p>
+            <a:pPr/>
+            <a:endParaRPr/>
+          </a:p>
         </p:txBody>
       </p:sp>
       <p:sp>
@@ -18763,7 +18998,10 @@
         </p:spPr>
         <p:txBody>
           <a:bodyPr/>
-          <a:p/>
+          <a:p>
+            <a:pPr/>
+            <a:endParaRPr/>
+          </a:p>
         </p:txBody>
       </p:sp>
       <p:sp>
@@ -18924,7 +19162,10 @@
         </p:spPr>
         <p:txBody>
           <a:bodyPr/>
-          <a:p/>
+          <a:p>
+            <a:pPr/>
+            <a:endParaRPr/>
+          </a:p>
         </p:txBody>
       </p:sp>
       <p:sp>
@@ -19077,7 +19318,10 @@
         </p:spPr>
         <p:txBody>
           <a:bodyPr/>
-          <a:p/>
+          <a:p>
+            <a:pPr/>
+            <a:endParaRPr/>
+          </a:p>
         </p:txBody>
       </p:sp>
       <p:sp>
@@ -19230,7 +19474,10 @@
         </p:spPr>
         <p:txBody>
           <a:bodyPr/>
-          <a:p/>
+          <a:p>
+            <a:pPr/>
+            <a:endParaRPr/>
+          </a:p>
         </p:txBody>
       </p:sp>
       <p:sp>
@@ -19398,7 +19645,10 @@
         </p:spPr>
         <p:txBody>
           <a:bodyPr/>
-          <a:p/>
+          <a:p>
+            <a:pPr/>
+            <a:endParaRPr/>
+          </a:p>
         </p:txBody>
       </p:sp>
       <p:sp>
